--- a/docs/draft_new_modules/02_wrangling_data/02_wrangling_data_lecture.pptx
+++ b/docs/draft_new_modules/02_wrangling_data/02_wrangling_data_lecture.pptx
@@ -24,9 +24,6 @@
     <p:sldId id="272" r:id="rId18"/>
     <p:sldId id="273" r:id="rId19"/>
     <p:sldId id="274" r:id="rId20"/>
-    <p:sldId id="275" r:id="rId21"/>
-    <p:sldId id="276" r:id="rId22"/>
-    <p:sldId id="277" r:id="rId23"/>
   </p:sldIdLst>
   <p:sldSz cx="9144000" cy="5143500" type="screen16x9"/>
   <p:notesSz cx="6858000" cy="9144000"/>
@@ -3201,12 +3198,12 @@
       </p:grpSpPr>
       <p:sp>
         <p:nvSpPr>
-          <p:cNvPr id="2" name="Title 1"/>
-          <p:cNvSpPr>
-            <a:spLocks noGrp="1"/>
-          </p:cNvSpPr>
-          <p:nvPr>
-            <p:ph type="title"/>
+          <p:cNvPr id="3" name="Content Placeholder 2"/>
+          <p:cNvSpPr>
+            <a:spLocks noGrp="1"/>
+          </p:cNvSpPr>
+          <p:nvPr>
+            <p:ph idx="1" sz="half"/>
           </p:nvPr>
         </p:nvSpPr>
         <p:spPr/>
@@ -3214,30 +3211,648 @@
           <a:bodyPr/>
           <a:lstStyle/>
           <a:p>
-            <a:pPr lvl="0" indent="0" marL="0">
-              <a:buNone/>
-            </a:pPr>
-            <a:r>
-              <a:rPr>
-                <a:latin typeface="Courier"/>
-              </a:rPr>
-              <a:t>mutate()</a:t>
-            </a:r>
-            <a:r>
-              <a:rPr/>
-              <a:t> — Creating and Changing Columns</a:t>
-            </a:r>
-          </a:p>
-        </p:txBody>
-      </p:sp>
-      <p:sp>
-        <p:nvSpPr>
-          <p:cNvPr id="3" name="Content Placeholder 2"/>
-          <p:cNvSpPr>
-            <a:spLocks noGrp="1"/>
-          </p:cNvSpPr>
-          <p:nvPr>
-            <p:ph idx="1"/>
+            <a:pPr lvl="0" indent="0">
+              <a:buNone/>
+            </a:pPr>
+            <a:r>
+              <a:rPr>
+                <a:solidFill>
+                  <a:srgbClr val="5E5E5E"/>
+                </a:solidFill>
+                <a:latin typeface="Courier"/>
+              </a:rPr>
+              <a:t># Add a converted-units column</a:t>
+            </a:r>
+            <a:br/>
+            <a:r>
+              <a:rPr>
+                <a:solidFill>
+                  <a:srgbClr val="003B4F"/>
+                </a:solidFill>
+                <a:latin typeface="Courier"/>
+              </a:rPr>
+              <a:t>pine_csv_df </a:t>
+            </a:r>
+            <a:r>
+              <a:rPr>
+                <a:solidFill>
+                  <a:srgbClr val="5E5E5E"/>
+                </a:solidFill>
+                <a:latin typeface="Courier"/>
+              </a:rPr>
+              <a:t>|&gt;</a:t>
+            </a:r>
+            <a:br/>
+            <a:r>
+              <a:rPr>
+                <a:solidFill>
+                  <a:srgbClr val="003B4F"/>
+                </a:solidFill>
+                <a:latin typeface="Courier"/>
+              </a:rPr>
+              <a:t>  </a:t>
+            </a:r>
+            <a:r>
+              <a:rPr>
+                <a:solidFill>
+                  <a:srgbClr val="4758AB"/>
+                </a:solidFill>
+                <a:latin typeface="Courier"/>
+              </a:rPr>
+              <a:t>mutate</a:t>
+            </a:r>
+            <a:r>
+              <a:rPr>
+                <a:solidFill>
+                  <a:srgbClr val="003B4F"/>
+                </a:solidFill>
+                <a:latin typeface="Courier"/>
+              </a:rPr>
+              <a:t>(</a:t>
+            </a:r>
+            <a:r>
+              <a:rPr>
+                <a:solidFill>
+                  <a:srgbClr val="657422"/>
+                </a:solidFill>
+                <a:latin typeface="Courier"/>
+              </a:rPr>
+              <a:t>length_cm =</a:t>
+            </a:r>
+            <a:r>
+              <a:rPr>
+                <a:solidFill>
+                  <a:srgbClr val="003B4F"/>
+                </a:solidFill>
+                <a:latin typeface="Courier"/>
+              </a:rPr>
+              <a:t> length_mm </a:t>
+            </a:r>
+            <a:r>
+              <a:rPr>
+                <a:solidFill>
+                  <a:srgbClr val="5E5E5E"/>
+                </a:solidFill>
+                <a:latin typeface="Courier"/>
+              </a:rPr>
+              <a:t>/</a:t>
+            </a:r>
+            <a:r>
+              <a:rPr>
+                <a:solidFill>
+                  <a:srgbClr val="003B4F"/>
+                </a:solidFill>
+                <a:latin typeface="Courier"/>
+              </a:rPr>
+              <a:t> </a:t>
+            </a:r>
+            <a:r>
+              <a:rPr>
+                <a:solidFill>
+                  <a:srgbClr val="AD0000"/>
+                </a:solidFill>
+                <a:latin typeface="Courier"/>
+              </a:rPr>
+              <a:t>10</a:t>
+            </a:r>
+            <a:r>
+              <a:rPr>
+                <a:solidFill>
+                  <a:srgbClr val="003B4F"/>
+                </a:solidFill>
+                <a:latin typeface="Courier"/>
+              </a:rPr>
+              <a:t>) </a:t>
+            </a:r>
+            <a:r>
+              <a:rPr>
+                <a:solidFill>
+                  <a:srgbClr val="5E5E5E"/>
+                </a:solidFill>
+                <a:latin typeface="Courier"/>
+              </a:rPr>
+              <a:t>|&gt;</a:t>
+            </a:r>
+            <a:br/>
+            <a:r>
+              <a:rPr>
+                <a:solidFill>
+                  <a:srgbClr val="003B4F"/>
+                </a:solidFill>
+                <a:latin typeface="Courier"/>
+              </a:rPr>
+              <a:t>  </a:t>
+            </a:r>
+            <a:r>
+              <a:rPr>
+                <a:solidFill>
+                  <a:srgbClr val="4758AB"/>
+                </a:solidFill>
+                <a:latin typeface="Courier"/>
+              </a:rPr>
+              <a:t>head</a:t>
+            </a:r>
+            <a:r>
+              <a:rPr>
+                <a:solidFill>
+                  <a:srgbClr val="003B4F"/>
+                </a:solidFill>
+                <a:latin typeface="Courier"/>
+              </a:rPr>
+              <a:t>()</a:t>
+            </a:r>
+          </a:p>
+          <a:p>
+            <a:pPr lvl="0" indent="0">
+              <a:buNone/>
+            </a:pPr>
+            <a:r>
+              <a:rPr>
+                <a:latin typeface="Courier"/>
+              </a:rPr>
+              <a:t># A tibble: 6 × 7
+  date    group       n_s   wind  tree_no length_mm length_cm
+  &lt;chr&gt;   &lt;chr&gt;       &lt;chr&gt; &lt;chr&gt;   &lt;dbl&gt;     &lt;dbl&gt;     &lt;dbl&gt;
+1 3/20/25 cephalopods n     lee         1        20       2  
+2 3/20/25 cephalopods n     lee         1        21       2.1
+3 3/20/25 cephalopods n     lee         1        23       2.3
+4 3/20/25 cephalopods n     lee         1        25       2.5
+5 3/20/25 cephalopods n     lee         1        21       2.1
+6 3/20/25 cephalopods n     lee         1        16       1.6</a:t>
+            </a:r>
+          </a:p>
+          <a:p>
+            <a:pPr lvl="0" indent="0">
+              <a:buNone/>
+            </a:pPr>
+            <a:r>
+              <a:rPr>
+                <a:solidFill>
+                  <a:srgbClr val="5E5E5E"/>
+                </a:solidFill>
+                <a:latin typeface="Courier"/>
+              </a:rPr>
+              <a:t># Add a log-transformed column</a:t>
+            </a:r>
+            <a:br/>
+            <a:r>
+              <a:rPr>
+                <a:solidFill>
+                  <a:srgbClr val="003B4F"/>
+                </a:solidFill>
+                <a:latin typeface="Courier"/>
+              </a:rPr>
+              <a:t>pine_csv_df </a:t>
+            </a:r>
+            <a:r>
+              <a:rPr>
+                <a:solidFill>
+                  <a:srgbClr val="5E5E5E"/>
+                </a:solidFill>
+                <a:latin typeface="Courier"/>
+              </a:rPr>
+              <a:t>|&gt;</a:t>
+            </a:r>
+            <a:br/>
+            <a:r>
+              <a:rPr>
+                <a:solidFill>
+                  <a:srgbClr val="003B4F"/>
+                </a:solidFill>
+                <a:latin typeface="Courier"/>
+              </a:rPr>
+              <a:t>  </a:t>
+            </a:r>
+            <a:r>
+              <a:rPr>
+                <a:solidFill>
+                  <a:srgbClr val="4758AB"/>
+                </a:solidFill>
+                <a:latin typeface="Courier"/>
+              </a:rPr>
+              <a:t>mutate</a:t>
+            </a:r>
+            <a:r>
+              <a:rPr>
+                <a:solidFill>
+                  <a:srgbClr val="003B4F"/>
+                </a:solidFill>
+                <a:latin typeface="Courier"/>
+              </a:rPr>
+              <a:t>(</a:t>
+            </a:r>
+            <a:r>
+              <a:rPr>
+                <a:solidFill>
+                  <a:srgbClr val="657422"/>
+                </a:solidFill>
+                <a:latin typeface="Courier"/>
+              </a:rPr>
+              <a:t>log_length =</a:t>
+            </a:r>
+            <a:r>
+              <a:rPr>
+                <a:solidFill>
+                  <a:srgbClr val="003B4F"/>
+                </a:solidFill>
+                <a:latin typeface="Courier"/>
+              </a:rPr>
+              <a:t> </a:t>
+            </a:r>
+            <a:r>
+              <a:rPr>
+                <a:solidFill>
+                  <a:srgbClr val="4758AB"/>
+                </a:solidFill>
+                <a:latin typeface="Courier"/>
+              </a:rPr>
+              <a:t>log</a:t>
+            </a:r>
+            <a:r>
+              <a:rPr>
+                <a:solidFill>
+                  <a:srgbClr val="003B4F"/>
+                </a:solidFill>
+                <a:latin typeface="Courier"/>
+              </a:rPr>
+              <a:t>(length_mm)) </a:t>
+            </a:r>
+            <a:r>
+              <a:rPr>
+                <a:solidFill>
+                  <a:srgbClr val="5E5E5E"/>
+                </a:solidFill>
+                <a:latin typeface="Courier"/>
+              </a:rPr>
+              <a:t>|&gt;</a:t>
+            </a:r>
+            <a:br/>
+            <a:r>
+              <a:rPr>
+                <a:solidFill>
+                  <a:srgbClr val="003B4F"/>
+                </a:solidFill>
+                <a:latin typeface="Courier"/>
+              </a:rPr>
+              <a:t>  </a:t>
+            </a:r>
+            <a:r>
+              <a:rPr>
+                <a:solidFill>
+                  <a:srgbClr val="4758AB"/>
+                </a:solidFill>
+                <a:latin typeface="Courier"/>
+              </a:rPr>
+              <a:t>head</a:t>
+            </a:r>
+            <a:r>
+              <a:rPr>
+                <a:solidFill>
+                  <a:srgbClr val="003B4F"/>
+                </a:solidFill>
+                <a:latin typeface="Courier"/>
+              </a:rPr>
+              <a:t>()</a:t>
+            </a:r>
+          </a:p>
+          <a:p>
+            <a:pPr lvl="0" indent="0">
+              <a:buNone/>
+            </a:pPr>
+            <a:r>
+              <a:rPr>
+                <a:latin typeface="Courier"/>
+              </a:rPr>
+              <a:t># A tibble: 6 × 7
+  date    group       n_s   wind  tree_no length_mm log_length
+  &lt;chr&gt;   &lt;chr&gt;       &lt;chr&gt; &lt;chr&gt;   &lt;dbl&gt;     &lt;dbl&gt;      &lt;dbl&gt;
+1 3/20/25 cephalopods n     lee         1        20       3.00
+2 3/20/25 cephalopods n     lee         1        21       3.04
+3 3/20/25 cephalopods n     lee         1        23       3.14
+4 3/20/25 cephalopods n     lee         1        25       3.22
+5 3/20/25 cephalopods n     lee         1        21       3.04
+6 3/20/25 cephalopods n     lee         1        16       2.77</a:t>
+            </a:r>
+          </a:p>
+          <a:p>
+            <a:pPr lvl="0" indent="0">
+              <a:buNone/>
+            </a:pPr>
+            <a:r>
+              <a:rPr>
+                <a:solidFill>
+                  <a:srgbClr val="5E5E5E"/>
+                </a:solidFill>
+                <a:latin typeface="Courier"/>
+              </a:rPr>
+              <a:t># mutate() can build on a column it just created</a:t>
+            </a:r>
+            <a:br/>
+            <a:r>
+              <a:rPr>
+                <a:solidFill>
+                  <a:srgbClr val="003B4F"/>
+                </a:solidFill>
+                <a:latin typeface="Courier"/>
+              </a:rPr>
+              <a:t>pine_csv_df </a:t>
+            </a:r>
+            <a:r>
+              <a:rPr>
+                <a:solidFill>
+                  <a:srgbClr val="5E5E5E"/>
+                </a:solidFill>
+                <a:latin typeface="Courier"/>
+              </a:rPr>
+              <a:t>|&gt;</a:t>
+            </a:r>
+            <a:br/>
+            <a:r>
+              <a:rPr>
+                <a:solidFill>
+                  <a:srgbClr val="003B4F"/>
+                </a:solidFill>
+                <a:latin typeface="Courier"/>
+              </a:rPr>
+              <a:t>  </a:t>
+            </a:r>
+            <a:r>
+              <a:rPr>
+                <a:solidFill>
+                  <a:srgbClr val="4758AB"/>
+                </a:solidFill>
+                <a:latin typeface="Courier"/>
+              </a:rPr>
+              <a:t>mutate</a:t>
+            </a:r>
+            <a:r>
+              <a:rPr>
+                <a:solidFill>
+                  <a:srgbClr val="003B4F"/>
+                </a:solidFill>
+                <a:latin typeface="Courier"/>
+              </a:rPr>
+              <a:t>(</a:t>
+            </a:r>
+            <a:br/>
+            <a:r>
+              <a:rPr>
+                <a:solidFill>
+                  <a:srgbClr val="003B4F"/>
+                </a:solidFill>
+                <a:latin typeface="Courier"/>
+              </a:rPr>
+              <a:t>    </a:t>
+            </a:r>
+            <a:r>
+              <a:rPr>
+                <a:solidFill>
+                  <a:srgbClr val="657422"/>
+                </a:solidFill>
+                <a:latin typeface="Courier"/>
+              </a:rPr>
+              <a:t>length_cm  =</a:t>
+            </a:r>
+            <a:r>
+              <a:rPr>
+                <a:solidFill>
+                  <a:srgbClr val="003B4F"/>
+                </a:solidFill>
+                <a:latin typeface="Courier"/>
+              </a:rPr>
+              <a:t> length_mm </a:t>
+            </a:r>
+            <a:r>
+              <a:rPr>
+                <a:solidFill>
+                  <a:srgbClr val="5E5E5E"/>
+                </a:solidFill>
+                <a:latin typeface="Courier"/>
+              </a:rPr>
+              <a:t>/</a:t>
+            </a:r>
+            <a:r>
+              <a:rPr>
+                <a:solidFill>
+                  <a:srgbClr val="003B4F"/>
+                </a:solidFill>
+                <a:latin typeface="Courier"/>
+              </a:rPr>
+              <a:t> </a:t>
+            </a:r>
+            <a:r>
+              <a:rPr>
+                <a:solidFill>
+                  <a:srgbClr val="AD0000"/>
+                </a:solidFill>
+                <a:latin typeface="Courier"/>
+              </a:rPr>
+              <a:t>10</a:t>
+            </a:r>
+            <a:r>
+              <a:rPr>
+                <a:solidFill>
+                  <a:srgbClr val="003B4F"/>
+                </a:solidFill>
+                <a:latin typeface="Courier"/>
+              </a:rPr>
+              <a:t>,</a:t>
+            </a:r>
+            <a:br/>
+            <a:r>
+              <a:rPr>
+                <a:solidFill>
+                  <a:srgbClr val="003B4F"/>
+                </a:solidFill>
+                <a:latin typeface="Courier"/>
+              </a:rPr>
+              <a:t>    </a:t>
+            </a:r>
+            <a:r>
+              <a:rPr>
+                <a:solidFill>
+                  <a:srgbClr val="657422"/>
+                </a:solidFill>
+                <a:latin typeface="Courier"/>
+              </a:rPr>
+              <a:t>size_class =</a:t>
+            </a:r>
+            <a:r>
+              <a:rPr>
+                <a:solidFill>
+                  <a:srgbClr val="003B4F"/>
+                </a:solidFill>
+                <a:latin typeface="Courier"/>
+              </a:rPr>
+              <a:t> </a:t>
+            </a:r>
+            <a:r>
+              <a:rPr>
+                <a:solidFill>
+                  <a:srgbClr val="4758AB"/>
+                </a:solidFill>
+                <a:latin typeface="Courier"/>
+              </a:rPr>
+              <a:t>if_else</a:t>
+            </a:r>
+            <a:r>
+              <a:rPr>
+                <a:solidFill>
+                  <a:srgbClr val="003B4F"/>
+                </a:solidFill>
+                <a:latin typeface="Courier"/>
+              </a:rPr>
+              <a:t>(length_mm </a:t>
+            </a:r>
+            <a:r>
+              <a:rPr>
+                <a:solidFill>
+                  <a:srgbClr val="5E5E5E"/>
+                </a:solidFill>
+                <a:latin typeface="Courier"/>
+              </a:rPr>
+              <a:t>&gt;</a:t>
+            </a:r>
+            <a:r>
+              <a:rPr>
+                <a:solidFill>
+                  <a:srgbClr val="003B4F"/>
+                </a:solidFill>
+                <a:latin typeface="Courier"/>
+              </a:rPr>
+              <a:t> </a:t>
+            </a:r>
+            <a:r>
+              <a:rPr>
+                <a:solidFill>
+                  <a:srgbClr val="AD0000"/>
+                </a:solidFill>
+                <a:latin typeface="Courier"/>
+              </a:rPr>
+              <a:t>18</a:t>
+            </a:r>
+            <a:r>
+              <a:rPr>
+                <a:solidFill>
+                  <a:srgbClr val="003B4F"/>
+                </a:solidFill>
+                <a:latin typeface="Courier"/>
+              </a:rPr>
+              <a:t>, </a:t>
+            </a:r>
+            <a:r>
+              <a:rPr>
+                <a:solidFill>
+                  <a:srgbClr val="20794D"/>
+                </a:solidFill>
+                <a:latin typeface="Courier"/>
+              </a:rPr>
+              <a:t>"long"</a:t>
+            </a:r>
+            <a:r>
+              <a:rPr>
+                <a:solidFill>
+                  <a:srgbClr val="003B4F"/>
+                </a:solidFill>
+                <a:latin typeface="Courier"/>
+              </a:rPr>
+              <a:t>, </a:t>
+            </a:r>
+            <a:r>
+              <a:rPr>
+                <a:solidFill>
+                  <a:srgbClr val="20794D"/>
+                </a:solidFill>
+                <a:latin typeface="Courier"/>
+              </a:rPr>
+              <a:t>"short"</a:t>
+            </a:r>
+            <a:r>
+              <a:rPr>
+                <a:solidFill>
+                  <a:srgbClr val="003B4F"/>
+                </a:solidFill>
+                <a:latin typeface="Courier"/>
+              </a:rPr>
+              <a:t>)</a:t>
+            </a:r>
+            <a:br/>
+            <a:r>
+              <a:rPr>
+                <a:solidFill>
+                  <a:srgbClr val="003B4F"/>
+                </a:solidFill>
+                <a:latin typeface="Courier"/>
+              </a:rPr>
+              <a:t>  ) </a:t>
+            </a:r>
+            <a:r>
+              <a:rPr>
+                <a:solidFill>
+                  <a:srgbClr val="5E5E5E"/>
+                </a:solidFill>
+                <a:latin typeface="Courier"/>
+              </a:rPr>
+              <a:t>|&gt;</a:t>
+            </a:r>
+            <a:br/>
+            <a:r>
+              <a:rPr>
+                <a:solidFill>
+                  <a:srgbClr val="003B4F"/>
+                </a:solidFill>
+                <a:latin typeface="Courier"/>
+              </a:rPr>
+              <a:t>  </a:t>
+            </a:r>
+            <a:r>
+              <a:rPr>
+                <a:solidFill>
+                  <a:srgbClr val="4758AB"/>
+                </a:solidFill>
+                <a:latin typeface="Courier"/>
+              </a:rPr>
+              <a:t>head</a:t>
+            </a:r>
+            <a:r>
+              <a:rPr>
+                <a:solidFill>
+                  <a:srgbClr val="003B4F"/>
+                </a:solidFill>
+                <a:latin typeface="Courier"/>
+              </a:rPr>
+              <a:t>()</a:t>
+            </a:r>
+          </a:p>
+          <a:p>
+            <a:pPr lvl="0" indent="0">
+              <a:buNone/>
+            </a:pPr>
+            <a:r>
+              <a:rPr>
+                <a:latin typeface="Courier"/>
+              </a:rPr>
+              <a:t># A tibble: 6 × 8
+  date    group       n_s   wind  tree_no length_mm length_cm size_class
+  &lt;chr&gt;   &lt;chr&gt;       &lt;chr&gt; &lt;chr&gt;   &lt;dbl&gt;     &lt;dbl&gt;     &lt;dbl&gt; &lt;chr&gt;     
+1 3/20/25 cephalopods n     lee         1        20       2   long      
+2 3/20/25 cephalopods n     lee         1        21       2.1 long      
+3 3/20/25 cephalopods n     lee         1        23       2.3 long      
+4 3/20/25 cephalopods n     lee         1        25       2.5 long      
+5 3/20/25 cephalopods n     lee         1        21       2.1 long      
+6 3/20/25 cephalopods n     lee         1        16       1.6 short     </a:t>
+            </a:r>
+          </a:p>
+        </p:txBody>
+      </p:sp>
+      <p:sp>
+        <p:nvSpPr>
+          <p:cNvPr id="4" name="Content Placeholder 3"/>
+          <p:cNvSpPr>
+            <a:spLocks noGrp="1"/>
+          </p:cNvSpPr>
+          <p:nvPr>
+            <p:ph idx="2" sz="half"/>
           </p:nvPr>
         </p:nvSpPr>
         <p:spPr/>
@@ -3259,57 +3874,75 @@
             </a:pPr>
             <a:r>
               <a:rPr sz="2000" b="1"/>
-              <a:t>🔮 Predict first:</a:t>
+              <a:t>✅ Key idea</a:t>
+            </a:r>
+          </a:p>
+          <a:p>
+            <a:pPr lvl="0" indent="0" marL="1270000">
+              <a:buNone/>
+            </a:pPr>
+            <a:r>
+              <a:rPr sz="2000">
+                <a:latin typeface="Courier"/>
+              </a:rPr>
+              <a:t>mutate()</a:t>
             </a:r>
             <a:r>
               <a:rPr sz="2000"/>
-              <a:t> </a:t>
+              <a:t> keeps every existing column and adds new ones to the right. To </a:t>
+            </a:r>
+            <a:r>
+              <a:rPr sz="2000" i="1"/>
+              <a:t>overwrite</a:t>
+            </a:r>
+            <a:r>
+              <a:rPr sz="2000"/>
+              <a:t> a column, reuse its name: </a:t>
             </a:r>
             <a:r>
               <a:rPr sz="2000">
                 <a:latin typeface="Courier"/>
               </a:rPr>
-              <a:t>length_mm / 10</a:t>
+              <a:t>mutate(length_mm = round(length_mm, 1))</a:t>
             </a:r>
             <a:r>
               <a:rPr sz="2000"/>
-              <a:t> converts millimeters to centimeters. Will </a:t>
-            </a:r>
-            <a:r>
-              <a:rPr sz="2000">
-                <a:latin typeface="Courier"/>
-              </a:rPr>
-              <a:t>mutate()</a:t>
-            </a:r>
+              <a:t>.</a:t>
+            </a:r>
+          </a:p>
+          <a:p>
+            <a:pPr lvl="0" indent="0" marL="1270000">
+              <a:buNone/>
+            </a:pPr>
+            <a:r>
+              <a:rPr sz="2000" b="1"/>
+              <a:t>Tip</a:t>
+            </a:r>
+          </a:p>
+          <a:p>
+            <a:pPr lvl="0" indent="0" marL="1270000">
+              <a:buNone/>
+            </a:pPr>
+            <a:r>
+              <a:rPr sz="2000" b="1"/>
+              <a:t>📖 Why log-transform?</a:t>
+            </a:r>
+          </a:p>
+          <a:p>
+            <a:pPr lvl="0" indent="0" marL="1270000">
+              <a:buNone/>
+            </a:pPr>
             <a:r>
               <a:rPr sz="2000"/>
-              <a:t> </a:t>
+              <a:t>Many biological measurements are </a:t>
             </a:r>
             <a:r>
               <a:rPr sz="2000" b="1"/>
-              <a:t>replace</a:t>
+              <a:t>right-skewed</a:t>
             </a:r>
             <a:r>
               <a:rPr sz="2000"/>
-              <a:t> </a:t>
-            </a:r>
-            <a:r>
-              <a:rPr sz="2000">
-                <a:latin typeface="Courier"/>
-              </a:rPr>
-              <a:t>length_mm</a:t>
-            </a:r>
-            <a:r>
-              <a:rPr sz="2000"/>
-              <a:t>, or </a:t>
-            </a:r>
-            <a:r>
-              <a:rPr sz="2000" b="1"/>
-              <a:t>add</a:t>
-            </a:r>
-            <a:r>
-              <a:rPr sz="2000"/>
-              <a:t> a new column? How many columns will the result have?</a:t>
+              <a:t> — a log transform pulls extreme values in and can make a distribution more symmetric before you summarize or test it. We’ll check whether it matters for our data in a later module.</a:t>
             </a:r>
           </a:p>
         </p:txBody>
@@ -3338,779 +3971,6 @@
       </p:grpSpPr>
       <p:sp>
         <p:nvSpPr>
-          <p:cNvPr id="3" name="Content Placeholder 2"/>
-          <p:cNvSpPr>
-            <a:spLocks noGrp="1"/>
-          </p:cNvSpPr>
-          <p:nvPr>
-            <p:ph idx="1" sz="half"/>
-          </p:nvPr>
-        </p:nvSpPr>
-        <p:spPr/>
-        <p:txBody>
-          <a:bodyPr/>
-          <a:lstStyle/>
-          <a:p>
-            <a:pPr lvl="0" indent="0">
-              <a:buNone/>
-            </a:pPr>
-            <a:r>
-              <a:rPr>
-                <a:solidFill>
-                  <a:srgbClr val="5E5E5E"/>
-                </a:solidFill>
-                <a:latin typeface="Courier"/>
-              </a:rPr>
-              <a:t># Add a converted-units column</a:t>
-            </a:r>
-            <a:br/>
-            <a:r>
-              <a:rPr>
-                <a:solidFill>
-                  <a:srgbClr val="003B4F"/>
-                </a:solidFill>
-                <a:latin typeface="Courier"/>
-              </a:rPr>
-              <a:t>pine_csv_df </a:t>
-            </a:r>
-            <a:r>
-              <a:rPr>
-                <a:solidFill>
-                  <a:srgbClr val="5E5E5E"/>
-                </a:solidFill>
-                <a:latin typeface="Courier"/>
-              </a:rPr>
-              <a:t>|&gt;</a:t>
-            </a:r>
-            <a:br/>
-            <a:r>
-              <a:rPr>
-                <a:solidFill>
-                  <a:srgbClr val="003B4F"/>
-                </a:solidFill>
-                <a:latin typeface="Courier"/>
-              </a:rPr>
-              <a:t>  </a:t>
-            </a:r>
-            <a:r>
-              <a:rPr>
-                <a:solidFill>
-                  <a:srgbClr val="4758AB"/>
-                </a:solidFill>
-                <a:latin typeface="Courier"/>
-              </a:rPr>
-              <a:t>mutate</a:t>
-            </a:r>
-            <a:r>
-              <a:rPr>
-                <a:solidFill>
-                  <a:srgbClr val="003B4F"/>
-                </a:solidFill>
-                <a:latin typeface="Courier"/>
-              </a:rPr>
-              <a:t>(</a:t>
-            </a:r>
-            <a:r>
-              <a:rPr>
-                <a:solidFill>
-                  <a:srgbClr val="657422"/>
-                </a:solidFill>
-                <a:latin typeface="Courier"/>
-              </a:rPr>
-              <a:t>length_cm =</a:t>
-            </a:r>
-            <a:r>
-              <a:rPr>
-                <a:solidFill>
-                  <a:srgbClr val="003B4F"/>
-                </a:solidFill>
-                <a:latin typeface="Courier"/>
-              </a:rPr>
-              <a:t> length_mm </a:t>
-            </a:r>
-            <a:r>
-              <a:rPr>
-                <a:solidFill>
-                  <a:srgbClr val="5E5E5E"/>
-                </a:solidFill>
-                <a:latin typeface="Courier"/>
-              </a:rPr>
-              <a:t>/</a:t>
-            </a:r>
-            <a:r>
-              <a:rPr>
-                <a:solidFill>
-                  <a:srgbClr val="003B4F"/>
-                </a:solidFill>
-                <a:latin typeface="Courier"/>
-              </a:rPr>
-              <a:t> </a:t>
-            </a:r>
-            <a:r>
-              <a:rPr>
-                <a:solidFill>
-                  <a:srgbClr val="AD0000"/>
-                </a:solidFill>
-                <a:latin typeface="Courier"/>
-              </a:rPr>
-              <a:t>10</a:t>
-            </a:r>
-            <a:r>
-              <a:rPr>
-                <a:solidFill>
-                  <a:srgbClr val="003B4F"/>
-                </a:solidFill>
-                <a:latin typeface="Courier"/>
-              </a:rPr>
-              <a:t>) </a:t>
-            </a:r>
-            <a:r>
-              <a:rPr>
-                <a:solidFill>
-                  <a:srgbClr val="5E5E5E"/>
-                </a:solidFill>
-                <a:latin typeface="Courier"/>
-              </a:rPr>
-              <a:t>|&gt;</a:t>
-            </a:r>
-            <a:br/>
-            <a:r>
-              <a:rPr>
-                <a:solidFill>
-                  <a:srgbClr val="003B4F"/>
-                </a:solidFill>
-                <a:latin typeface="Courier"/>
-              </a:rPr>
-              <a:t>  </a:t>
-            </a:r>
-            <a:r>
-              <a:rPr>
-                <a:solidFill>
-                  <a:srgbClr val="4758AB"/>
-                </a:solidFill>
-                <a:latin typeface="Courier"/>
-              </a:rPr>
-              <a:t>head</a:t>
-            </a:r>
-            <a:r>
-              <a:rPr>
-                <a:solidFill>
-                  <a:srgbClr val="003B4F"/>
-                </a:solidFill>
-                <a:latin typeface="Courier"/>
-              </a:rPr>
-              <a:t>()</a:t>
-            </a:r>
-          </a:p>
-          <a:p>
-            <a:pPr lvl="0" indent="0">
-              <a:buNone/>
-            </a:pPr>
-            <a:r>
-              <a:rPr>
-                <a:latin typeface="Courier"/>
-              </a:rPr>
-              <a:t># A tibble: 6 × 7
-  date    group       n_s   wind  tree_no length_mm length_cm
-  &lt;chr&gt;   &lt;chr&gt;       &lt;chr&gt; &lt;chr&gt;   &lt;dbl&gt;     &lt;dbl&gt;     &lt;dbl&gt;
-1 3/20/25 cephalopods n     lee         1        20       2  
-2 3/20/25 cephalopods n     lee         1        21       2.1
-3 3/20/25 cephalopods n     lee         1        23       2.3
-4 3/20/25 cephalopods n     lee         1        25       2.5
-5 3/20/25 cephalopods n     lee         1        21       2.1
-6 3/20/25 cephalopods n     lee         1        16       1.6</a:t>
-            </a:r>
-          </a:p>
-          <a:p>
-            <a:pPr lvl="0" indent="0">
-              <a:buNone/>
-            </a:pPr>
-            <a:r>
-              <a:rPr>
-                <a:solidFill>
-                  <a:srgbClr val="5E5E5E"/>
-                </a:solidFill>
-                <a:latin typeface="Courier"/>
-              </a:rPr>
-              <a:t># Add a log-transformed column</a:t>
-            </a:r>
-            <a:br/>
-            <a:r>
-              <a:rPr>
-                <a:solidFill>
-                  <a:srgbClr val="003B4F"/>
-                </a:solidFill>
-                <a:latin typeface="Courier"/>
-              </a:rPr>
-              <a:t>pine_csv_df </a:t>
-            </a:r>
-            <a:r>
-              <a:rPr>
-                <a:solidFill>
-                  <a:srgbClr val="5E5E5E"/>
-                </a:solidFill>
-                <a:latin typeface="Courier"/>
-              </a:rPr>
-              <a:t>|&gt;</a:t>
-            </a:r>
-            <a:br/>
-            <a:r>
-              <a:rPr>
-                <a:solidFill>
-                  <a:srgbClr val="003B4F"/>
-                </a:solidFill>
-                <a:latin typeface="Courier"/>
-              </a:rPr>
-              <a:t>  </a:t>
-            </a:r>
-            <a:r>
-              <a:rPr>
-                <a:solidFill>
-                  <a:srgbClr val="4758AB"/>
-                </a:solidFill>
-                <a:latin typeface="Courier"/>
-              </a:rPr>
-              <a:t>mutate</a:t>
-            </a:r>
-            <a:r>
-              <a:rPr>
-                <a:solidFill>
-                  <a:srgbClr val="003B4F"/>
-                </a:solidFill>
-                <a:latin typeface="Courier"/>
-              </a:rPr>
-              <a:t>(</a:t>
-            </a:r>
-            <a:r>
-              <a:rPr>
-                <a:solidFill>
-                  <a:srgbClr val="657422"/>
-                </a:solidFill>
-                <a:latin typeface="Courier"/>
-              </a:rPr>
-              <a:t>log_length =</a:t>
-            </a:r>
-            <a:r>
-              <a:rPr>
-                <a:solidFill>
-                  <a:srgbClr val="003B4F"/>
-                </a:solidFill>
-                <a:latin typeface="Courier"/>
-              </a:rPr>
-              <a:t> </a:t>
-            </a:r>
-            <a:r>
-              <a:rPr>
-                <a:solidFill>
-                  <a:srgbClr val="4758AB"/>
-                </a:solidFill>
-                <a:latin typeface="Courier"/>
-              </a:rPr>
-              <a:t>log</a:t>
-            </a:r>
-            <a:r>
-              <a:rPr>
-                <a:solidFill>
-                  <a:srgbClr val="003B4F"/>
-                </a:solidFill>
-                <a:latin typeface="Courier"/>
-              </a:rPr>
-              <a:t>(length_mm)) </a:t>
-            </a:r>
-            <a:r>
-              <a:rPr>
-                <a:solidFill>
-                  <a:srgbClr val="5E5E5E"/>
-                </a:solidFill>
-                <a:latin typeface="Courier"/>
-              </a:rPr>
-              <a:t>|&gt;</a:t>
-            </a:r>
-            <a:br/>
-            <a:r>
-              <a:rPr>
-                <a:solidFill>
-                  <a:srgbClr val="003B4F"/>
-                </a:solidFill>
-                <a:latin typeface="Courier"/>
-              </a:rPr>
-              <a:t>  </a:t>
-            </a:r>
-            <a:r>
-              <a:rPr>
-                <a:solidFill>
-                  <a:srgbClr val="4758AB"/>
-                </a:solidFill>
-                <a:latin typeface="Courier"/>
-              </a:rPr>
-              <a:t>head</a:t>
-            </a:r>
-            <a:r>
-              <a:rPr>
-                <a:solidFill>
-                  <a:srgbClr val="003B4F"/>
-                </a:solidFill>
-                <a:latin typeface="Courier"/>
-              </a:rPr>
-              <a:t>()</a:t>
-            </a:r>
-          </a:p>
-          <a:p>
-            <a:pPr lvl="0" indent="0">
-              <a:buNone/>
-            </a:pPr>
-            <a:r>
-              <a:rPr>
-                <a:latin typeface="Courier"/>
-              </a:rPr>
-              <a:t># A tibble: 6 × 7
-  date    group       n_s   wind  tree_no length_mm log_length
-  &lt;chr&gt;   &lt;chr&gt;       &lt;chr&gt; &lt;chr&gt;   &lt;dbl&gt;     &lt;dbl&gt;      &lt;dbl&gt;
-1 3/20/25 cephalopods n     lee         1        20       3.00
-2 3/20/25 cephalopods n     lee         1        21       3.04
-3 3/20/25 cephalopods n     lee         1        23       3.14
-4 3/20/25 cephalopods n     lee         1        25       3.22
-5 3/20/25 cephalopods n     lee         1        21       3.04
-6 3/20/25 cephalopods n     lee         1        16       2.77</a:t>
-            </a:r>
-          </a:p>
-          <a:p>
-            <a:pPr lvl="0" indent="0">
-              <a:buNone/>
-            </a:pPr>
-            <a:r>
-              <a:rPr>
-                <a:solidFill>
-                  <a:srgbClr val="5E5E5E"/>
-                </a:solidFill>
-                <a:latin typeface="Courier"/>
-              </a:rPr>
-              <a:t># mutate() can build on a column it just created</a:t>
-            </a:r>
-            <a:br/>
-            <a:r>
-              <a:rPr>
-                <a:solidFill>
-                  <a:srgbClr val="003B4F"/>
-                </a:solidFill>
-                <a:latin typeface="Courier"/>
-              </a:rPr>
-              <a:t>pine_csv_df </a:t>
-            </a:r>
-            <a:r>
-              <a:rPr>
-                <a:solidFill>
-                  <a:srgbClr val="5E5E5E"/>
-                </a:solidFill>
-                <a:latin typeface="Courier"/>
-              </a:rPr>
-              <a:t>|&gt;</a:t>
-            </a:r>
-            <a:br/>
-            <a:r>
-              <a:rPr>
-                <a:solidFill>
-                  <a:srgbClr val="003B4F"/>
-                </a:solidFill>
-                <a:latin typeface="Courier"/>
-              </a:rPr>
-              <a:t>  </a:t>
-            </a:r>
-            <a:r>
-              <a:rPr>
-                <a:solidFill>
-                  <a:srgbClr val="4758AB"/>
-                </a:solidFill>
-                <a:latin typeface="Courier"/>
-              </a:rPr>
-              <a:t>mutate</a:t>
-            </a:r>
-            <a:r>
-              <a:rPr>
-                <a:solidFill>
-                  <a:srgbClr val="003B4F"/>
-                </a:solidFill>
-                <a:latin typeface="Courier"/>
-              </a:rPr>
-              <a:t>(</a:t>
-            </a:r>
-            <a:br/>
-            <a:r>
-              <a:rPr>
-                <a:solidFill>
-                  <a:srgbClr val="003B4F"/>
-                </a:solidFill>
-                <a:latin typeface="Courier"/>
-              </a:rPr>
-              <a:t>    </a:t>
-            </a:r>
-            <a:r>
-              <a:rPr>
-                <a:solidFill>
-                  <a:srgbClr val="657422"/>
-                </a:solidFill>
-                <a:latin typeface="Courier"/>
-              </a:rPr>
-              <a:t>length_cm  =</a:t>
-            </a:r>
-            <a:r>
-              <a:rPr>
-                <a:solidFill>
-                  <a:srgbClr val="003B4F"/>
-                </a:solidFill>
-                <a:latin typeface="Courier"/>
-              </a:rPr>
-              <a:t> length_mm </a:t>
-            </a:r>
-            <a:r>
-              <a:rPr>
-                <a:solidFill>
-                  <a:srgbClr val="5E5E5E"/>
-                </a:solidFill>
-                <a:latin typeface="Courier"/>
-              </a:rPr>
-              <a:t>/</a:t>
-            </a:r>
-            <a:r>
-              <a:rPr>
-                <a:solidFill>
-                  <a:srgbClr val="003B4F"/>
-                </a:solidFill>
-                <a:latin typeface="Courier"/>
-              </a:rPr>
-              <a:t> </a:t>
-            </a:r>
-            <a:r>
-              <a:rPr>
-                <a:solidFill>
-                  <a:srgbClr val="AD0000"/>
-                </a:solidFill>
-                <a:latin typeface="Courier"/>
-              </a:rPr>
-              <a:t>10</a:t>
-            </a:r>
-            <a:r>
-              <a:rPr>
-                <a:solidFill>
-                  <a:srgbClr val="003B4F"/>
-                </a:solidFill>
-                <a:latin typeface="Courier"/>
-              </a:rPr>
-              <a:t>,</a:t>
-            </a:r>
-            <a:br/>
-            <a:r>
-              <a:rPr>
-                <a:solidFill>
-                  <a:srgbClr val="003B4F"/>
-                </a:solidFill>
-                <a:latin typeface="Courier"/>
-              </a:rPr>
-              <a:t>    </a:t>
-            </a:r>
-            <a:r>
-              <a:rPr>
-                <a:solidFill>
-                  <a:srgbClr val="657422"/>
-                </a:solidFill>
-                <a:latin typeface="Courier"/>
-              </a:rPr>
-              <a:t>size_class =</a:t>
-            </a:r>
-            <a:r>
-              <a:rPr>
-                <a:solidFill>
-                  <a:srgbClr val="003B4F"/>
-                </a:solidFill>
-                <a:latin typeface="Courier"/>
-              </a:rPr>
-              <a:t> </a:t>
-            </a:r>
-            <a:r>
-              <a:rPr>
-                <a:solidFill>
-                  <a:srgbClr val="4758AB"/>
-                </a:solidFill>
-                <a:latin typeface="Courier"/>
-              </a:rPr>
-              <a:t>if_else</a:t>
-            </a:r>
-            <a:r>
-              <a:rPr>
-                <a:solidFill>
-                  <a:srgbClr val="003B4F"/>
-                </a:solidFill>
-                <a:latin typeface="Courier"/>
-              </a:rPr>
-              <a:t>(length_mm </a:t>
-            </a:r>
-            <a:r>
-              <a:rPr>
-                <a:solidFill>
-                  <a:srgbClr val="5E5E5E"/>
-                </a:solidFill>
-                <a:latin typeface="Courier"/>
-              </a:rPr>
-              <a:t>&gt;</a:t>
-            </a:r>
-            <a:r>
-              <a:rPr>
-                <a:solidFill>
-                  <a:srgbClr val="003B4F"/>
-                </a:solidFill>
-                <a:latin typeface="Courier"/>
-              </a:rPr>
-              <a:t> </a:t>
-            </a:r>
-            <a:r>
-              <a:rPr>
-                <a:solidFill>
-                  <a:srgbClr val="AD0000"/>
-                </a:solidFill>
-                <a:latin typeface="Courier"/>
-              </a:rPr>
-              <a:t>18</a:t>
-            </a:r>
-            <a:r>
-              <a:rPr>
-                <a:solidFill>
-                  <a:srgbClr val="003B4F"/>
-                </a:solidFill>
-                <a:latin typeface="Courier"/>
-              </a:rPr>
-              <a:t>, </a:t>
-            </a:r>
-            <a:r>
-              <a:rPr>
-                <a:solidFill>
-                  <a:srgbClr val="20794D"/>
-                </a:solidFill>
-                <a:latin typeface="Courier"/>
-              </a:rPr>
-              <a:t>"long"</a:t>
-            </a:r>
-            <a:r>
-              <a:rPr>
-                <a:solidFill>
-                  <a:srgbClr val="003B4F"/>
-                </a:solidFill>
-                <a:latin typeface="Courier"/>
-              </a:rPr>
-              <a:t>, </a:t>
-            </a:r>
-            <a:r>
-              <a:rPr>
-                <a:solidFill>
-                  <a:srgbClr val="20794D"/>
-                </a:solidFill>
-                <a:latin typeface="Courier"/>
-              </a:rPr>
-              <a:t>"short"</a:t>
-            </a:r>
-            <a:r>
-              <a:rPr>
-                <a:solidFill>
-                  <a:srgbClr val="003B4F"/>
-                </a:solidFill>
-                <a:latin typeface="Courier"/>
-              </a:rPr>
-              <a:t>)</a:t>
-            </a:r>
-            <a:br/>
-            <a:r>
-              <a:rPr>
-                <a:solidFill>
-                  <a:srgbClr val="003B4F"/>
-                </a:solidFill>
-                <a:latin typeface="Courier"/>
-              </a:rPr>
-              <a:t>  ) </a:t>
-            </a:r>
-            <a:r>
-              <a:rPr>
-                <a:solidFill>
-                  <a:srgbClr val="5E5E5E"/>
-                </a:solidFill>
-                <a:latin typeface="Courier"/>
-              </a:rPr>
-              <a:t>|&gt;</a:t>
-            </a:r>
-            <a:br/>
-            <a:r>
-              <a:rPr>
-                <a:solidFill>
-                  <a:srgbClr val="003B4F"/>
-                </a:solidFill>
-                <a:latin typeface="Courier"/>
-              </a:rPr>
-              <a:t>  </a:t>
-            </a:r>
-            <a:r>
-              <a:rPr>
-                <a:solidFill>
-                  <a:srgbClr val="4758AB"/>
-                </a:solidFill>
-                <a:latin typeface="Courier"/>
-              </a:rPr>
-              <a:t>head</a:t>
-            </a:r>
-            <a:r>
-              <a:rPr>
-                <a:solidFill>
-                  <a:srgbClr val="003B4F"/>
-                </a:solidFill>
-                <a:latin typeface="Courier"/>
-              </a:rPr>
-              <a:t>()</a:t>
-            </a:r>
-          </a:p>
-          <a:p>
-            <a:pPr lvl="0" indent="0">
-              <a:buNone/>
-            </a:pPr>
-            <a:r>
-              <a:rPr>
-                <a:latin typeface="Courier"/>
-              </a:rPr>
-              <a:t># A tibble: 6 × 8
-  date    group       n_s   wind  tree_no length_mm length_cm size_class
-  &lt;chr&gt;   &lt;chr&gt;       &lt;chr&gt; &lt;chr&gt;   &lt;dbl&gt;     &lt;dbl&gt;     &lt;dbl&gt; &lt;chr&gt;     
-1 3/20/25 cephalopods n     lee         1        20       2   long      
-2 3/20/25 cephalopods n     lee         1        21       2.1 long      
-3 3/20/25 cephalopods n     lee         1        23       2.3 long      
-4 3/20/25 cephalopods n     lee         1        25       2.5 long      
-5 3/20/25 cephalopods n     lee         1        21       2.1 long      
-6 3/20/25 cephalopods n     lee         1        16       1.6 short     </a:t>
-            </a:r>
-          </a:p>
-        </p:txBody>
-      </p:sp>
-      <p:sp>
-        <p:nvSpPr>
-          <p:cNvPr id="4" name="Content Placeholder 3"/>
-          <p:cNvSpPr>
-            <a:spLocks noGrp="1"/>
-          </p:cNvSpPr>
-          <p:nvPr>
-            <p:ph idx="2" sz="half"/>
-          </p:nvPr>
-        </p:nvSpPr>
-        <p:spPr/>
-        <p:txBody>
-          <a:bodyPr/>
-          <a:lstStyle/>
-          <a:p>
-            <a:pPr lvl="0" indent="0" marL="1270000">
-              <a:buNone/>
-            </a:pPr>
-            <a:r>
-              <a:rPr sz="2000" b="1"/>
-              <a:t>Note</a:t>
-            </a:r>
-          </a:p>
-          <a:p>
-            <a:pPr lvl="0" indent="0" marL="1270000">
-              <a:buNone/>
-            </a:pPr>
-            <a:r>
-              <a:rPr sz="2000" b="1"/>
-              <a:t>✅ Key idea</a:t>
-            </a:r>
-          </a:p>
-          <a:p>
-            <a:pPr lvl="0" indent="0" marL="1270000">
-              <a:buNone/>
-            </a:pPr>
-            <a:r>
-              <a:rPr sz="2000">
-                <a:latin typeface="Courier"/>
-              </a:rPr>
-              <a:t>mutate()</a:t>
-            </a:r>
-            <a:r>
-              <a:rPr sz="2000"/>
-              <a:t> keeps every existing column and adds new ones to the right. To </a:t>
-            </a:r>
-            <a:r>
-              <a:rPr sz="2000" i="1"/>
-              <a:t>overwrite</a:t>
-            </a:r>
-            <a:r>
-              <a:rPr sz="2000"/>
-              <a:t> a column, reuse its name: </a:t>
-            </a:r>
-            <a:r>
-              <a:rPr sz="2000">
-                <a:latin typeface="Courier"/>
-              </a:rPr>
-              <a:t>mutate(length_mm = round(length_mm, 1))</a:t>
-            </a:r>
-            <a:r>
-              <a:rPr sz="2000"/>
-              <a:t>.</a:t>
-            </a:r>
-          </a:p>
-          <a:p>
-            <a:pPr lvl="0" indent="0" marL="1270000">
-              <a:buNone/>
-            </a:pPr>
-            <a:r>
-              <a:rPr sz="2000" b="1"/>
-              <a:t>Tip</a:t>
-            </a:r>
-          </a:p>
-          <a:p>
-            <a:pPr lvl="0" indent="0" marL="1270000">
-              <a:buNone/>
-            </a:pPr>
-            <a:r>
-              <a:rPr sz="2000" b="1"/>
-              <a:t>📖 Why log-transform?</a:t>
-            </a:r>
-          </a:p>
-          <a:p>
-            <a:pPr lvl="0" indent="0" marL="1270000">
-              <a:buNone/>
-            </a:pPr>
-            <a:r>
-              <a:rPr sz="2000"/>
-              <a:t>Many biological measurements are </a:t>
-            </a:r>
-            <a:r>
-              <a:rPr sz="2000" b="1"/>
-              <a:t>right-skewed</a:t>
-            </a:r>
-            <a:r>
-              <a:rPr sz="2000"/>
-              <a:t> — a log transform pulls extreme values in and can make a distribution more symmetric before you summarize or test it. We’ll check whether it matters for our data in a later module.</a:t>
-            </a:r>
-          </a:p>
-        </p:txBody>
-      </p:sp>
-    </p:spTree>
-  </p:cSld>
-</p:sld>
-</file>
-
-<file path=ppt/slides/slide12.xml><?xml version="1.0" encoding="utf-8"?>
-<p:sld xmlns:a="http://schemas.openxmlformats.org/drawingml/2006/main" xmlns:r="http://schemas.openxmlformats.org/officeDocument/2006/relationships" xmlns:p="http://schemas.openxmlformats.org/presentationml/2006/main">
-  <p:cSld>
-    <p:spTree>
-      <p:nvGrpSpPr>
-        <p:cNvPr id="1" name=""/>
-        <p:cNvGrpSpPr/>
-        <p:nvPr/>
-      </p:nvGrpSpPr>
-      <p:grpSpPr>
-        <a:xfrm>
-          <a:off x="0" y="0"/>
-          <a:ext cx="0" cy="0"/>
-          <a:chOff x="0" y="0"/>
-          <a:chExt cx="0" cy="0"/>
-        </a:xfrm>
-      </p:grpSpPr>
-      <p:sp>
-        <p:nvSpPr>
           <p:cNvPr id="2" name="Title 1"/>
           <p:cNvSpPr>
             <a:spLocks noGrp="1"/>
@@ -4540,7 +4400,7 @@
 </p:sld>
 </file>
 
-<file path=ppt/slides/slide13.xml><?xml version="1.0" encoding="utf-8"?>
+<file path=ppt/slides/slide12.xml><?xml version="1.0" encoding="utf-8"?>
 <p:sld xmlns:a="http://schemas.openxmlformats.org/drawingml/2006/main" xmlns:r="http://schemas.openxmlformats.org/officeDocument/2006/relationships" xmlns:p="http://schemas.openxmlformats.org/presentationml/2006/main">
   <p:cSld>
     <p:spTree>
@@ -5424,6 +5284,311 @@
 </p:sld>
 </file>
 
+<file path=ppt/slides/slide13.xml><?xml version="1.0" encoding="utf-8"?>
+<p:sld xmlns:a="http://schemas.openxmlformats.org/drawingml/2006/main" xmlns:r="http://schemas.openxmlformats.org/officeDocument/2006/relationships" xmlns:p="http://schemas.openxmlformats.org/presentationml/2006/main">
+  <p:cSld>
+    <p:spTree>
+      <p:nvGrpSpPr>
+        <p:cNvPr id="1" name=""/>
+        <p:cNvGrpSpPr/>
+        <p:nvPr/>
+      </p:nvGrpSpPr>
+      <p:grpSpPr>
+        <a:xfrm>
+          <a:off x="0" y="0"/>
+          <a:ext cx="0" cy="0"/>
+          <a:chOff x="0" y="0"/>
+          <a:chExt cx="0" cy="0"/>
+        </a:xfrm>
+      </p:grpSpPr>
+      <p:sp>
+        <p:nvSpPr>
+          <p:cNvPr id="2" name="Title 1"/>
+          <p:cNvSpPr>
+            <a:spLocks noGrp="1"/>
+          </p:cNvSpPr>
+          <p:nvPr>
+            <p:ph type="title"/>
+          </p:nvPr>
+        </p:nvSpPr>
+        <p:spPr/>
+        <p:txBody>
+          <a:bodyPr/>
+          <a:lstStyle/>
+          <a:p>
+            <a:pPr lvl="0" indent="0" marL="0">
+              <a:buNone/>
+            </a:pPr>
+            <a:r>
+              <a:rPr/>
+              <a:t>Part 3 · A Duplicate-Row Problem</a:t>
+            </a:r>
+          </a:p>
+        </p:txBody>
+      </p:sp>
+      <p:sp>
+        <p:nvSpPr>
+          <p:cNvPr id="3" name="Content Placeholder 2"/>
+          <p:cNvSpPr>
+            <a:spLocks noGrp="1"/>
+          </p:cNvSpPr>
+          <p:nvPr>
+            <p:ph idx="1" sz="half"/>
+          </p:nvPr>
+        </p:nvSpPr>
+        <p:spPr/>
+        <p:txBody>
+          <a:bodyPr/>
+          <a:lstStyle/>
+          <a:p>
+            <a:pPr lvl="0" indent="0" marL="0">
+              <a:buNone/>
+            </a:pPr>
+            <a:r>
+              <a:rPr/>
+              <a:t>Remember </a:t>
+            </a:r>
+            <a:r>
+              <a:rPr b="1"/>
+              <a:t>pseudoreplication</a:t>
+            </a:r>
+            <a:r>
+              <a:rPr/>
+              <a:t> from Module 1 — one tree standing in for many? Duplicate rows are the data-entry version of the same mistake: the same measurement counted twice inflates your sample size without adding real information.</a:t>
+            </a:r>
+          </a:p>
+          <a:p>
+            <a:pPr lvl="0" indent="0">
+              <a:buNone/>
+            </a:pPr>
+            <a:r>
+              <a:rPr>
+                <a:solidFill>
+                  <a:srgbClr val="003B4F"/>
+                </a:solidFill>
+                <a:latin typeface="Courier"/>
+              </a:rPr>
+              <a:t>needle_check_df &lt;- </a:t>
+            </a:r>
+            <a:r>
+              <a:rPr>
+                <a:solidFill>
+                  <a:srgbClr val="4758AB"/>
+                </a:solidFill>
+                <a:latin typeface="Courier"/>
+              </a:rPr>
+              <a:t>read_csv</a:t>
+            </a:r>
+            <a:r>
+              <a:rPr>
+                <a:solidFill>
+                  <a:srgbClr val="003B4F"/>
+                </a:solidFill>
+                <a:latin typeface="Courier"/>
+              </a:rPr>
+              <a:t>(</a:t>
+            </a:r>
+            <a:r>
+              <a:rPr>
+                <a:solidFill>
+                  <a:srgbClr val="20794D"/>
+                </a:solidFill>
+                <a:latin typeface="Courier"/>
+              </a:rPr>
+              <a:t>"data/pine_needles_error.csv"</a:t>
+            </a:r>
+            <a:r>
+              <a:rPr>
+                <a:solidFill>
+                  <a:srgbClr val="003B4F"/>
+                </a:solidFill>
+                <a:latin typeface="Courier"/>
+              </a:rPr>
+              <a:t>)</a:t>
+            </a:r>
+            <a:br/>
+            <a:br/>
+            <a:r>
+              <a:rPr>
+                <a:solidFill>
+                  <a:srgbClr val="4758AB"/>
+                </a:solidFill>
+                <a:latin typeface="Courier"/>
+              </a:rPr>
+              <a:t>nrow</a:t>
+            </a:r>
+            <a:r>
+              <a:rPr>
+                <a:solidFill>
+                  <a:srgbClr val="003B4F"/>
+                </a:solidFill>
+                <a:latin typeface="Courier"/>
+              </a:rPr>
+              <a:t>(needle_check_df)</a:t>
+            </a:r>
+          </a:p>
+          <a:p>
+            <a:pPr lvl="0" indent="0">
+              <a:buNone/>
+            </a:pPr>
+            <a:r>
+              <a:rPr>
+                <a:latin typeface="Courier"/>
+              </a:rPr>
+              <a:t>[1] 36</a:t>
+            </a:r>
+          </a:p>
+          <a:p>
+            <a:pPr lvl="0" indent="0">
+              <a:buNone/>
+            </a:pPr>
+            <a:r>
+              <a:rPr>
+                <a:solidFill>
+                  <a:srgbClr val="4758AB"/>
+                </a:solidFill>
+                <a:latin typeface="Courier"/>
+              </a:rPr>
+              <a:t>n_distinct</a:t>
+            </a:r>
+            <a:r>
+              <a:rPr>
+                <a:solidFill>
+                  <a:srgbClr val="003B4F"/>
+                </a:solidFill>
+                <a:latin typeface="Courier"/>
+              </a:rPr>
+              <a:t>(needle_check_df)</a:t>
+            </a:r>
+          </a:p>
+          <a:p>
+            <a:pPr lvl="0" indent="0">
+              <a:buNone/>
+            </a:pPr>
+            <a:r>
+              <a:rPr>
+                <a:latin typeface="Courier"/>
+              </a:rPr>
+              <a:t>[1] 18</a:t>
+            </a:r>
+          </a:p>
+          <a:p>
+            <a:pPr lvl="0" indent="0" marL="1270000">
+              <a:buNone/>
+            </a:pPr>
+            <a:r>
+              <a:rPr sz="2000" b="1"/>
+              <a:t>Important</a:t>
+            </a:r>
+          </a:p>
+          <a:p>
+            <a:pPr lvl="0" indent="0" marL="1270000">
+              <a:buNone/>
+            </a:pPr>
+            <a:r>
+              <a:rPr sz="2000" b="1"/>
+              <a:t>Something’s wrong:</a:t>
+            </a:r>
+            <a:r>
+              <a:rPr sz="2000"/>
+              <a:t> </a:t>
+            </a:r>
+            <a:r>
+              <a:rPr sz="2000">
+                <a:latin typeface="Courier"/>
+              </a:rPr>
+              <a:t>nrow()</a:t>
+            </a:r>
+            <a:r>
+              <a:rPr sz="2000"/>
+              <a:t> and </a:t>
+            </a:r>
+            <a:r>
+              <a:rPr sz="2000">
+                <a:latin typeface="Courier"/>
+              </a:rPr>
+              <a:t>n_distinct()</a:t>
+            </a:r>
+            <a:r>
+              <a:rPr sz="2000"/>
+              <a:t> don’t match. Some rows are exact repeats.</a:t>
+            </a:r>
+          </a:p>
+        </p:txBody>
+      </p:sp>
+      <p:sp>
+        <p:nvSpPr>
+          <p:cNvPr id="4" name="Content Placeholder 3"/>
+          <p:cNvSpPr>
+            <a:spLocks noGrp="1"/>
+          </p:cNvSpPr>
+          <p:nvPr>
+            <p:ph idx="2" sz="half"/>
+          </p:nvPr>
+        </p:nvSpPr>
+        <p:spPr/>
+        <p:txBody>
+          <a:bodyPr/>
+          <a:lstStyle/>
+          <a:p>
+            <a:pPr lvl="0" indent="0" marL="1270000">
+              <a:buNone/>
+            </a:pPr>
+            <a:r>
+              <a:rPr sz="2000" b="1"/>
+              <a:t>Note</a:t>
+            </a:r>
+          </a:p>
+          <a:p>
+            <a:pPr lvl="0" indent="0" marL="1270000">
+              <a:buNone/>
+            </a:pPr>
+            <a:r>
+              <a:rPr sz="2000" b="1"/>
+              <a:t>📖 New words</a:t>
+            </a:r>
+          </a:p>
+          <a:p>
+            <a:pPr lvl="0"/>
+            <a:r>
+              <a:rPr sz="2000" b="1">
+                <a:latin typeface="Courier"/>
+              </a:rPr>
+              <a:t>n_distinct()</a:t>
+            </a:r>
+            <a:r>
+              <a:rPr sz="2000"/>
+              <a:t> — counts how many </a:t>
+            </a:r>
+            <a:r>
+              <a:rPr sz="2000" i="1"/>
+              <a:t>unique</a:t>
+            </a:r>
+            <a:r>
+              <a:rPr sz="2000"/>
+              <a:t> rows exist</a:t>
+            </a:r>
+          </a:p>
+          <a:p>
+            <a:pPr lvl="0"/>
+            <a:r>
+              <a:rPr sz="2000" b="1">
+                <a:latin typeface="Courier"/>
+              </a:rPr>
+              <a:t>distinct()</a:t>
+            </a:r>
+            <a:r>
+              <a:rPr sz="2000"/>
+              <a:t> — returns the data with duplicate rows removed</a:t>
+            </a:r>
+          </a:p>
+        </p:txBody>
+      </p:sp>
+    </p:spTree>
+  </p:cSld>
+</p:sld>
+</file>
+
 <file path=ppt/slides/slide14.xml><?xml version="1.0" encoding="utf-8"?>
 <p:sld xmlns:a="http://schemas.openxmlformats.org/drawingml/2006/main" xmlns:r="http://schemas.openxmlformats.org/officeDocument/2006/relationships" xmlns:p="http://schemas.openxmlformats.org/presentationml/2006/main">
   <p:cSld>
@@ -5461,7 +5626,7 @@
             </a:pPr>
             <a:r>
               <a:rPr/>
-              <a:t>Part 3 · A Duplicate-Row Problem</a:t>
+              <a:t>Finding and removing the duplicates</a:t>
             </a:r>
           </a:p>
         </p:txBody>
@@ -5481,34 +5646,45 @@
           <a:bodyPr/>
           <a:lstStyle/>
           <a:p>
-            <a:pPr lvl="0" indent="0" marL="0">
-              <a:buNone/>
-            </a:pPr>
-            <a:r>
-              <a:rPr/>
-              <a:t>Remember </a:t>
-            </a:r>
-            <a:r>
-              <a:rPr b="1"/>
-              <a:t>pseudoreplication</a:t>
-            </a:r>
-            <a:r>
-              <a:rPr/>
-              <a:t> from Module 1 — one tree standing in for many? Duplicate rows are the data-entry version of the same mistake: the same measurement counted twice inflates your sample size without adding real information.</a:t>
-            </a:r>
-          </a:p>
-          <a:p>
             <a:pPr lvl="0" indent="0">
               <a:buNone/>
             </a:pPr>
             <a:r>
               <a:rPr>
                 <a:solidFill>
-                  <a:srgbClr val="003B4F"/>
-                </a:solidFill>
-                <a:latin typeface="Courier"/>
-              </a:rPr>
-              <a:t>needle_check_df &lt;- </a:t>
+                  <a:srgbClr val="5E5E5E"/>
+                </a:solidFill>
+                <a:latin typeface="Courier"/>
+              </a:rPr>
+              <a:t># Which rows are exact duplicates of an earlier row?</a:t>
+            </a:r>
+            <a:br/>
+            <a:r>
+              <a:rPr>
+                <a:solidFill>
+                  <a:srgbClr val="003B4F"/>
+                </a:solidFill>
+                <a:latin typeface="Courier"/>
+              </a:rPr>
+              <a:t>needle_check_df </a:t>
+            </a:r>
+            <a:r>
+              <a:rPr>
+                <a:solidFill>
+                  <a:srgbClr val="5E5E5E"/>
+                </a:solidFill>
+                <a:latin typeface="Courier"/>
+              </a:rPr>
+              <a:t>|&gt;</a:t>
+            </a:r>
+            <a:r>
+              <a:rPr>
+                <a:solidFill>
+                  <a:srgbClr val="003B4F"/>
+                </a:solidFill>
+                <a:latin typeface="Courier"/>
+              </a:rPr>
+              <a:t> </a:t>
             </a:r>
             <a:r>
               <a:rPr>
@@ -5517,7 +5693,7 @@
                 </a:solidFill>
                 <a:latin typeface="Courier"/>
               </a:rPr>
-              <a:t>read_csv</a:t>
+              <a:t>filter</a:t>
             </a:r>
             <a:r>
               <a:rPr>
@@ -5531,20 +5707,111 @@
             <a:r>
               <a:rPr>
                 <a:solidFill>
-                  <a:srgbClr val="20794D"/>
-                </a:solidFill>
-                <a:latin typeface="Courier"/>
-              </a:rPr>
-              <a:t>"data/pine_needles_error.csv"</a:t>
-            </a:r>
-            <a:r>
-              <a:rPr>
-                <a:solidFill>
-                  <a:srgbClr val="003B4F"/>
-                </a:solidFill>
-                <a:latin typeface="Courier"/>
-              </a:rPr>
-              <a:t>)</a:t>
+                  <a:srgbClr val="4758AB"/>
+                </a:solidFill>
+                <a:latin typeface="Courier"/>
+              </a:rPr>
+              <a:t>duplicated</a:t>
+            </a:r>
+            <a:r>
+              <a:rPr>
+                <a:solidFill>
+                  <a:srgbClr val="003B4F"/>
+                </a:solidFill>
+                <a:latin typeface="Courier"/>
+              </a:rPr>
+              <a:t>(needle_check_df))</a:t>
+            </a:r>
+          </a:p>
+          <a:p>
+            <a:pPr lvl="0" indent="0">
+              <a:buNone/>
+            </a:pPr>
+            <a:r>
+              <a:rPr>
+                <a:latin typeface="Courier"/>
+              </a:rPr>
+              <a:t># A tibble: 18 × 5
+   name  species needle_id needle_name length_mm
+   &lt;chr&gt; &lt;chr&gt;       &lt;dbl&gt; &lt;chr&gt;           &lt;dbl&gt;
+ 1 John  a               1 one              21.1
+ 2 John  a               2 two              21.2
+ 3 John  a               3 three            21.5
+ 4 Mary  a               1 one              21  
+ 5 Mary  a               2 two              21.1
+ 6 Mary  a               3 three            21.3
+ 7 Steve a               1 one              21.4
+ 8 Steve a               2 two              21.3
+ 9 Steve a               3 three            21.9
+10 Harry a               1 one              24.1
+11 Harry a               2 two              24.2
+12 Harry a               3 three            24.3
+13 Stan  a               1 one              22.1
+14 Stan  a               2 two              22.2
+15 Stan  a               3 three            22.4
+16 Jake  a               1 one              20.3
+17 Jake  a               2 two              20.4
+18 Jake  a               3 three            20.1</a:t>
+            </a:r>
+          </a:p>
+          <a:p>
+            <a:pPr lvl="0" indent="0">
+              <a:buNone/>
+            </a:pPr>
+            <a:r>
+              <a:rPr>
+                <a:solidFill>
+                  <a:srgbClr val="5E5E5E"/>
+                </a:solidFill>
+                <a:latin typeface="Courier"/>
+              </a:rPr>
+              <a:t># Keep only one copy of each unique row</a:t>
+            </a:r>
+            <a:br/>
+            <a:r>
+              <a:rPr>
+                <a:solidFill>
+                  <a:srgbClr val="003B4F"/>
+                </a:solidFill>
+                <a:latin typeface="Courier"/>
+              </a:rPr>
+              <a:t>needle_clean_df &lt;- needle_check_df </a:t>
+            </a:r>
+            <a:r>
+              <a:rPr>
+                <a:solidFill>
+                  <a:srgbClr val="5E5E5E"/>
+                </a:solidFill>
+                <a:latin typeface="Courier"/>
+              </a:rPr>
+              <a:t>|&gt;</a:t>
+            </a:r>
+            <a:r>
+              <a:rPr>
+                <a:solidFill>
+                  <a:srgbClr val="003B4F"/>
+                </a:solidFill>
+                <a:latin typeface="Courier"/>
+              </a:rPr>
+              <a:t> </a:t>
+            </a:r>
+            <a:r>
+              <a:rPr>
+                <a:solidFill>
+                  <a:srgbClr val="4758AB"/>
+                </a:solidFill>
+                <a:latin typeface="Courier"/>
+              </a:rPr>
+              <a:t>distinct</a:t>
+            </a:r>
+            <a:r>
+              <a:rPr>
+                <a:solidFill>
+                  <a:srgbClr val="003B4F"/>
+                </a:solidFill>
+                <a:latin typeface="Courier"/>
+              </a:rPr>
+              <a:t>()</a:t>
             </a:r>
             <a:br/>
             <a:br/>
@@ -5589,16 +5856,16 @@
                 </a:solidFill>
                 <a:latin typeface="Courier"/>
               </a:rPr>
-              <a:t>n_distinct</a:t>
-            </a:r>
-            <a:r>
-              <a:rPr>
-                <a:solidFill>
-                  <a:srgbClr val="003B4F"/>
-                </a:solidFill>
-                <a:latin typeface="Courier"/>
-              </a:rPr>
-              <a:t>(needle_check_df)</a:t>
+              <a:t>nrow</a:t>
+            </a:r>
+            <a:r>
+              <a:rPr>
+                <a:solidFill>
+                  <a:srgbClr val="003B4F"/>
+                </a:solidFill>
+                <a:latin typeface="Courier"/>
+              </a:rPr>
+              <a:t>(needle_clean_df)</a:t>
             </a:r>
           </a:p>
           <a:p>
@@ -5618,7 +5885,7 @@
             </a:pPr>
             <a:r>
               <a:rPr sz="2000" b="1"/>
-              <a:t>Important</a:t>
+              <a:t>Warning</a:t>
             </a:r>
           </a:p>
           <a:p>
@@ -5627,31 +5894,50 @@
             </a:pPr>
             <a:r>
               <a:rPr sz="2000" b="1"/>
-              <a:t>Something’s wrong:</a:t>
+              <a:t>⚠️ Watch out!</a:t>
+            </a:r>
+          </a:p>
+          <a:p>
+            <a:pPr lvl="0" indent="0" marL="1270000">
+              <a:buNone/>
+            </a:pPr>
+            <a:r>
+              <a:rPr sz="2000">
+                <a:latin typeface="Courier"/>
+              </a:rPr>
+              <a:t>distinct()</a:t>
             </a:r>
             <a:r>
               <a:rPr sz="2000"/>
-              <a:t> </a:t>
+              <a:t> only catches </a:t>
+            </a:r>
+            <a:r>
+              <a:rPr sz="2000" i="1"/>
+              <a:t>exact</a:t>
+            </a:r>
+            <a:r>
+              <a:rPr sz="2000"/>
+              <a:t> duplicate rows. A typo’d duplicate (</a:t>
             </a:r>
             <a:r>
               <a:rPr sz="2000">
                 <a:latin typeface="Courier"/>
               </a:rPr>
-              <a:t>nrow()</a:t>
+              <a:t>John</a:t>
             </a:r>
             <a:r>
               <a:rPr sz="2000"/>
-              <a:t> and </a:t>
+              <a:t> vs </a:t>
             </a:r>
             <a:r>
               <a:rPr sz="2000">
                 <a:latin typeface="Courier"/>
               </a:rPr>
-              <a:t>n_distinct()</a:t>
+              <a:t>john</a:t>
             </a:r>
             <a:r>
               <a:rPr sz="2000"/>
-              <a:t> don’t match. Some rows are exact repeats.</a:t>
+              <a:t>) slips right through — always eyeball your data too.</a:t>
             </a:r>
           </a:p>
         </p:txBody>
@@ -5676,7 +5962,7 @@
             </a:pPr>
             <a:r>
               <a:rPr sz="2000" b="1"/>
-              <a:t>Note</a:t>
+              <a:t>Tip</a:t>
             </a:r>
           </a:p>
           <a:p>
@@ -5685,41 +5971,36 @@
             </a:pPr>
             <a:r>
               <a:rPr sz="2000" b="1"/>
-              <a:t>📖 New words</a:t>
-            </a:r>
-          </a:p>
-          <a:p>
-            <a:pPr lvl="0"/>
-            <a:r>
-              <a:rPr sz="2000" b="1">
+              <a:t>🖐 Field habit</a:t>
+            </a:r>
+          </a:p>
+          <a:p>
+            <a:pPr lvl="0" indent="0" marL="1270000">
+              <a:buNone/>
+            </a:pPr>
+            <a:r>
+              <a:rPr sz="2000"/>
+              <a:t>Before you trust any dataset — yours or a collaborator’s — check </a:t>
+            </a:r>
+            <a:r>
+              <a:rPr sz="2000">
+                <a:latin typeface="Courier"/>
+              </a:rPr>
+              <a:t>nrow()</a:t>
+            </a:r>
+            <a:r>
+              <a:rPr sz="2000"/>
+              <a:t> against </a:t>
+            </a:r>
+            <a:r>
+              <a:rPr sz="2000">
                 <a:latin typeface="Courier"/>
               </a:rPr>
               <a:t>n_distinct()</a:t>
             </a:r>
             <a:r>
               <a:rPr sz="2000"/>
-              <a:t> — counts how many </a:t>
-            </a:r>
-            <a:r>
-              <a:rPr sz="2000" i="1"/>
-              <a:t>unique</a:t>
-            </a:r>
-            <a:r>
-              <a:rPr sz="2000"/>
-              <a:t> rows exist</a:t>
-            </a:r>
-          </a:p>
-          <a:p>
-            <a:pPr lvl="0"/>
-            <a:r>
-              <a:rPr sz="2000" b="1">
-                <a:latin typeface="Courier"/>
-              </a:rPr>
-              <a:t>distinct()</a:t>
-            </a:r>
-            <a:r>
-              <a:rPr sz="2000"/>
-              <a:t> — returns the data with duplicate rows removed</a:t>
+              <a:t>. It takes five seconds and catches a real, common mistake.</a:t>
             </a:r>
           </a:p>
         </p:txBody>
@@ -5748,6 +6029,31 @@
       </p:grpSpPr>
       <p:sp>
         <p:nvSpPr>
+          <p:cNvPr id="2" name="Title 1"/>
+          <p:cNvSpPr>
+            <a:spLocks noGrp="1"/>
+          </p:cNvSpPr>
+          <p:nvPr>
+            <p:ph type="title"/>
+          </p:nvPr>
+        </p:nvSpPr>
+        <p:spPr/>
+        <p:txBody>
+          <a:bodyPr/>
+          <a:lstStyle/>
+          <a:p>
+            <a:pPr lvl="0" indent="0" marL="0">
+              <a:buNone/>
+            </a:pPr>
+            <a:r>
+              <a:rPr/>
+              <a:t>Part 4 · Saving Your Work</a:t>
+            </a:r>
+          </a:p>
+        </p:txBody>
+      </p:sp>
+      <p:sp>
+        <p:nvSpPr>
           <p:cNvPr id="3" name="Content Placeholder 2"/>
           <p:cNvSpPr>
             <a:spLocks noGrp="1"/>
@@ -5768,8 +6074,20 @@
               <a:buNone/>
             </a:pPr>
             <a:r>
+              <a:rPr b="1">
+                <a:latin typeface="Courier"/>
+              </a:rPr>
+              <a:t>write_csv()</a:t>
+            </a:r>
+            <a:r>
               <a:rPr b="1"/>
-              <a:t>Finding and removing the duplicates</a:t>
+              <a:t> — the mirror image of </a:t>
+            </a:r>
+            <a:r>
+              <a:rPr b="1">
+                <a:latin typeface="Courier"/>
+              </a:rPr>
+              <a:t>read_csv()</a:t>
             </a:r>
           </a:p>
         </p:txBody>
@@ -5817,292 +6135,108 @@
             <a:r>
               <a:rPr>
                 <a:solidFill>
-                  <a:srgbClr val="5E5E5E"/>
-                </a:solidFill>
-                <a:latin typeface="Courier"/>
-              </a:rPr>
-              <a:t># Which rows are exact duplicates of an earlier row?</a:t>
-            </a:r>
-            <a:br/>
-            <a:r>
-              <a:rPr>
-                <a:solidFill>
-                  <a:srgbClr val="003B4F"/>
-                </a:solidFill>
-                <a:latin typeface="Courier"/>
-              </a:rPr>
-              <a:t>needle_check_df </a:t>
-            </a:r>
-            <a:r>
-              <a:rPr>
-                <a:solidFill>
-                  <a:srgbClr val="5E5E5E"/>
-                </a:solidFill>
-                <a:latin typeface="Courier"/>
-              </a:rPr>
-              <a:t>|&gt;</a:t>
-            </a:r>
-            <a:r>
-              <a:rPr>
-                <a:solidFill>
-                  <a:srgbClr val="003B4F"/>
-                </a:solidFill>
-                <a:latin typeface="Courier"/>
-              </a:rPr>
+                  <a:srgbClr val="4758AB"/>
+                </a:solidFill>
+                <a:latin typeface="Courier"/>
+              </a:rPr>
+              <a:t>write_csv</a:t>
+            </a:r>
+            <a:r>
+              <a:rPr>
+                <a:solidFill>
+                  <a:srgbClr val="003B4F"/>
+                </a:solidFill>
+                <a:latin typeface="Courier"/>
+              </a:rPr>
+              <a:t>(pine_wrangled_df, </a:t>
+            </a:r>
+            <a:r>
+              <a:rPr>
+                <a:solidFill>
+                  <a:srgbClr val="20794D"/>
+                </a:solidFill>
+                <a:latin typeface="Courier"/>
+              </a:rPr>
+              <a:t>"data/pine_needles_wrangled.csv"</a:t>
+            </a:r>
+            <a:r>
+              <a:rPr>
+                <a:solidFill>
+                  <a:srgbClr val="003B4F"/>
+                </a:solidFill>
+                <a:latin typeface="Courier"/>
+              </a:rPr>
+              <a:t>)</a:t>
+            </a:r>
+          </a:p>
+          <a:p>
+            <a:pPr lvl="0" indent="0" marL="1270000">
+              <a:buNone/>
+            </a:pPr>
+            <a:r>
+              <a:rPr sz="2000" b="1"/>
+              <a:t>Important</a:t>
+            </a:r>
+          </a:p>
+          <a:p>
+            <a:pPr lvl="0" indent="0" marL="1270000">
+              <a:buNone/>
+            </a:pPr>
+            <a:r>
+              <a:rPr sz="2000" b="1"/>
+              <a:t>Raw data is read-only.</a:t>
+            </a:r>
+            <a:r>
+              <a:rPr sz="2000"/>
               <a:t> </a:t>
             </a:r>
             <a:r>
-              <a:rPr>
-                <a:solidFill>
-                  <a:srgbClr val="4758AB"/>
-                </a:solidFill>
-                <a:latin typeface="Courier"/>
-              </a:rPr>
-              <a:t>filter</a:t>
-            </a:r>
-            <a:r>
-              <a:rPr>
-                <a:solidFill>
-                  <a:srgbClr val="003B4F"/>
-                </a:solidFill>
-                <a:latin typeface="Courier"/>
-              </a:rPr>
-              <a:t>(</a:t>
-            </a:r>
-            <a:r>
-              <a:rPr>
-                <a:solidFill>
-                  <a:srgbClr val="4758AB"/>
-                </a:solidFill>
-                <a:latin typeface="Courier"/>
-              </a:rPr>
-              <a:t>duplicated</a:t>
-            </a:r>
-            <a:r>
-              <a:rPr>
-                <a:solidFill>
-                  <a:srgbClr val="003B4F"/>
-                </a:solidFill>
-                <a:latin typeface="Courier"/>
-              </a:rPr>
-              <a:t>(needle_check_df))</a:t>
-            </a:r>
-          </a:p>
-          <a:p>
-            <a:pPr lvl="0" indent="0">
-              <a:buNone/>
-            </a:pPr>
-            <a:r>
-              <a:rPr>
-                <a:latin typeface="Courier"/>
-              </a:rPr>
-              <a:t># A tibble: 18 × 5
-   name  species needle_id needle_name length_mm
-   &lt;chr&gt; &lt;chr&gt;       &lt;dbl&gt; &lt;chr&gt;           &lt;dbl&gt;
- 1 John  a               1 one              21.1
- 2 John  a               2 two              21.2
- 3 John  a               3 three            21.5
- 4 Mary  a               1 one              21  
- 5 Mary  a               2 two              21.1
- 6 Mary  a               3 three            21.3
- 7 Steve a               1 one              21.4
- 8 Steve a               2 two              21.3
- 9 Steve a               3 three            21.9
-10 Harry a               1 one              24.1
-11 Harry a               2 two              24.2
-12 Harry a               3 three            24.3
-13 Stan  a               1 one              22.1
-14 Stan  a               2 two              22.2
-15 Stan  a               3 three            22.4
-16 Jake  a               1 one              20.3
-17 Jake  a               2 two              20.4
-18 Jake  a               3 three            20.1</a:t>
-            </a:r>
-          </a:p>
-          <a:p>
-            <a:pPr lvl="0" indent="0">
-              <a:buNone/>
-            </a:pPr>
-            <a:r>
-              <a:rPr>
-                <a:solidFill>
-                  <a:srgbClr val="5E5E5E"/>
-                </a:solidFill>
-                <a:latin typeface="Courier"/>
-              </a:rPr>
-              <a:t># Keep only one copy of each unique row</a:t>
-            </a:r>
-            <a:br/>
-            <a:r>
-              <a:rPr>
-                <a:solidFill>
-                  <a:srgbClr val="003B4F"/>
-                </a:solidFill>
-                <a:latin typeface="Courier"/>
-              </a:rPr>
-              <a:t>needle_clean_df &lt;- needle_check_df </a:t>
-            </a:r>
-            <a:r>
-              <a:rPr>
-                <a:solidFill>
-                  <a:srgbClr val="5E5E5E"/>
-                </a:solidFill>
-                <a:latin typeface="Courier"/>
-              </a:rPr>
-              <a:t>|&gt;</a:t>
-            </a:r>
-            <a:r>
-              <a:rPr>
-                <a:solidFill>
-                  <a:srgbClr val="003B4F"/>
-                </a:solidFill>
-                <a:latin typeface="Courier"/>
-              </a:rPr>
-              <a:t> </a:t>
-            </a:r>
-            <a:r>
-              <a:rPr>
-                <a:solidFill>
-                  <a:srgbClr val="4758AB"/>
-                </a:solidFill>
-                <a:latin typeface="Courier"/>
-              </a:rPr>
-              <a:t>distinct</a:t>
-            </a:r>
-            <a:r>
-              <a:rPr>
-                <a:solidFill>
-                  <a:srgbClr val="003B4F"/>
-                </a:solidFill>
-                <a:latin typeface="Courier"/>
-              </a:rPr>
-              <a:t>()</a:t>
-            </a:r>
-            <a:br/>
-            <a:br/>
-            <a:r>
-              <a:rPr>
-                <a:solidFill>
-                  <a:srgbClr val="4758AB"/>
-                </a:solidFill>
-                <a:latin typeface="Courier"/>
-              </a:rPr>
-              <a:t>nrow</a:t>
-            </a:r>
-            <a:r>
-              <a:rPr>
-                <a:solidFill>
-                  <a:srgbClr val="003B4F"/>
-                </a:solidFill>
-                <a:latin typeface="Courier"/>
-              </a:rPr>
-              <a:t>(needle_check_df)</a:t>
-            </a:r>
-          </a:p>
-          <a:p>
-            <a:pPr lvl="0" indent="0">
-              <a:buNone/>
-            </a:pPr>
-            <a:r>
-              <a:rPr>
-                <a:latin typeface="Courier"/>
-              </a:rPr>
-              <a:t>[1] 36</a:t>
-            </a:r>
-          </a:p>
-          <a:p>
-            <a:pPr lvl="0" indent="0">
-              <a:buNone/>
-            </a:pPr>
-            <a:r>
-              <a:rPr>
-                <a:solidFill>
-                  <a:srgbClr val="4758AB"/>
-                </a:solidFill>
-                <a:latin typeface="Courier"/>
-              </a:rPr>
-              <a:t>nrow</a:t>
-            </a:r>
-            <a:r>
-              <a:rPr>
-                <a:solidFill>
-                  <a:srgbClr val="003B4F"/>
-                </a:solidFill>
-                <a:latin typeface="Courier"/>
-              </a:rPr>
-              <a:t>(needle_clean_df)</a:t>
-            </a:r>
-          </a:p>
-          <a:p>
-            <a:pPr lvl="0" indent="0">
-              <a:buNone/>
-            </a:pPr>
-            <a:r>
-              <a:rPr>
-                <a:latin typeface="Courier"/>
-              </a:rPr>
-              <a:t>[1] 18</a:t>
-            </a:r>
-          </a:p>
-          <a:p>
-            <a:pPr lvl="0" indent="0" marL="1270000">
-              <a:buNone/>
-            </a:pPr>
+              <a:rPr sz="2000">
+                <a:latin typeface="Courier"/>
+              </a:rPr>
+              <a:t>pine_needles.csv</a:t>
+            </a:r>
+            <a:r>
+              <a:rPr sz="2000"/>
+              <a:t> never gets overwritten — </a:t>
+            </a:r>
+            <a:r>
+              <a:rPr sz="2000">
+                <a:latin typeface="Courier"/>
+              </a:rPr>
+              <a:t>write_csv()</a:t>
+            </a:r>
+            <a:r>
+              <a:rPr sz="2000"/>
+              <a:t> always creates a </a:t>
+            </a:r>
             <a:r>
               <a:rPr sz="2000" b="1"/>
-              <a:t>Warning</a:t>
-            </a:r>
-          </a:p>
-          <a:p>
-            <a:pPr lvl="0" indent="0" marL="1270000">
-              <a:buNone/>
-            </a:pPr>
-            <a:r>
-              <a:rPr sz="2000" b="1"/>
-              <a:t>⚠️ Watch out!</a:t>
-            </a:r>
-          </a:p>
-          <a:p>
-            <a:pPr lvl="0" indent="0" marL="1270000">
-              <a:buNone/>
-            </a:pPr>
+              <a:t>new, separate file</a:t>
+            </a:r>
+            <a:r>
+              <a:rPr sz="2000"/>
+              <a:t>. That’s why we named it </a:t>
+            </a:r>
             <a:r>
               <a:rPr sz="2000">
                 <a:latin typeface="Courier"/>
               </a:rPr>
-              <a:t>distinct()</a:t>
+              <a:t>pine_needles_wrangled.csv</a:t>
             </a:r>
             <a:r>
               <a:rPr sz="2000"/>
-              <a:t> only catches </a:t>
-            </a:r>
-            <a:r>
-              <a:rPr sz="2000" i="1"/>
-              <a:t>exact</a:t>
+              <a:t>, not </a:t>
+            </a:r>
+            <a:r>
+              <a:rPr sz="2000">
+                <a:latin typeface="Courier"/>
+              </a:rPr>
+              <a:t>pine_needles.csv</a:t>
             </a:r>
             <a:r>
               <a:rPr sz="2000"/>
-              <a:t> duplicate rows. A typo’d duplicate (</a:t>
-            </a:r>
-            <a:r>
-              <a:rPr sz="2000">
-                <a:latin typeface="Courier"/>
-              </a:rPr>
-              <a:t>John</a:t>
-            </a:r>
-            <a:r>
-              <a:rPr sz="2000"/>
-              <a:t> vs </a:t>
-            </a:r>
-            <a:r>
-              <a:rPr sz="2000">
-                <a:latin typeface="Courier"/>
-              </a:rPr>
-              <a:t>john</a:t>
-            </a:r>
-            <a:r>
-              <a:rPr sz="2000"/>
-              <a:t>) slips right through — always eyeball your data too.</a:t>
+              <a:t>.</a:t>
             </a:r>
           </a:p>
         </p:txBody>
@@ -6127,7 +6261,7 @@
             </a:pPr>
             <a:r>
               <a:rPr sz="2000" b="1"/>
-              <a:t>Tip</a:t>
+              <a:t>Note</a:t>
             </a:r>
           </a:p>
           <a:p>
@@ -6136,7 +6270,7 @@
             </a:pPr>
             <a:r>
               <a:rPr sz="2000" b="1"/>
-              <a:t>🖐 Field habit</a:t>
+              <a:t>✅ Key idea</a:t>
             </a:r>
           </a:p>
           <a:p>
@@ -6145,27 +6279,7 @@
             </a:pPr>
             <a:r>
               <a:rPr sz="2000"/>
-              <a:t>Before you trust any dataset — yours or a collaborator’s — check </a:t>
-            </a:r>
-            <a:r>
-              <a:rPr sz="2000">
-                <a:latin typeface="Courier"/>
-              </a:rPr>
-              <a:t>nrow()</a:t>
-            </a:r>
-            <a:r>
-              <a:rPr sz="2000"/>
-              <a:t> against </a:t>
-            </a:r>
-            <a:r>
-              <a:rPr sz="2000">
-                <a:latin typeface="Courier"/>
-              </a:rPr>
-              <a:t>n_distinct()</a:t>
-            </a:r>
-            <a:r>
-              <a:rPr sz="2000"/>
-              <a:t>. It takes five seconds and catches a real, common mistake.</a:t>
+              <a:t>If you can’t reproduce a result from raw data + a script, something’s wrong with the script — never with the raw file. Keeping raw data untouched is what makes that guarantee possible.</a:t>
             </a:r>
           </a:p>
         </p:txBody>
@@ -6212,7 +6326,7 @@
             </a:pPr>
             <a:r>
               <a:rPr/>
-              <a:t>Part 4 · Saving Your Work</a:t>
+              <a:t>Naming your saved files</a:t>
             </a:r>
           </a:p>
         </p:txBody>
@@ -6224,7 +6338,7 @@
             <a:spLocks noGrp="1"/>
           </p:cNvSpPr>
           <p:nvPr>
-            <p:ph idx="1"/>
+            <p:ph idx="1" sz="half"/>
           </p:nvPr>
         </p:nvSpPr>
         <p:spPr/>
@@ -6232,27 +6346,166 @@
           <a:bodyPr/>
           <a:lstStyle/>
           <a:p>
-            <a:pPr lvl="0" indent="0" marL="0">
-              <a:spcBef>
-                <a:spcPts val="3000"/>
-              </a:spcBef>
-              <a:buNone/>
-            </a:pPr>
-            <a:r>
-              <a:rPr b="1">
-                <a:latin typeface="Courier"/>
-              </a:rPr>
-              <a:t>write_csv()</a:t>
-            </a:r>
-            <a:r>
-              <a:rPr b="1"/>
-              <a:t> — the mirror image of </a:t>
-            </a:r>
-            <a:r>
-              <a:rPr b="1">
-                <a:latin typeface="Courier"/>
-              </a:rPr>
-              <a:t>read_csv()</a:t>
+            <a:pPr lvl="0"/>
+            <a:r>
+              <a:rPr/>
+              <a:t>Never overwrite </a:t>
+            </a:r>
+            <a:r>
+              <a:rPr>
+                <a:latin typeface="Courier"/>
+              </a:rPr>
+              <a:t>data/pine_needles.csv</a:t>
+            </a:r>
+            <a:r>
+              <a:rPr/>
+              <a:t> — that file is raw</a:t>
+            </a:r>
+          </a:p>
+          <a:p>
+            <a:pPr lvl="0"/>
+            <a:r>
+              <a:rPr/>
+              <a:t>Save wrangled output with a name that says what happened: </a:t>
+            </a:r>
+            <a:r>
+              <a:rPr>
+                <a:latin typeface="Courier"/>
+              </a:rPr>
+              <a:t>pine_needles_wrangled.csv</a:t>
+            </a:r>
+            <a:r>
+              <a:rPr/>
+              <a:t>, not </a:t>
+            </a:r>
+            <a:r>
+              <a:rPr>
+                <a:latin typeface="Courier"/>
+              </a:rPr>
+              <a:t>pine_needles2.csv</a:t>
+            </a:r>
+            <a:r>
+              <a:rPr/>
+              <a:t> or </a:t>
+            </a:r>
+            <a:r>
+              <a:rPr>
+                <a:latin typeface="Courier"/>
+              </a:rPr>
+              <a:t>final.csv</a:t>
+            </a:r>
+          </a:p>
+          <a:p>
+            <a:pPr lvl="0"/>
+            <a:r>
+              <a:rPr/>
+              <a:t>Anyone re-running your script from scratch should get the exact same output file</a:t>
+            </a:r>
+          </a:p>
+          <a:p>
+            <a:pPr lvl="0" indent="0" marL="1270000">
+              <a:buNone/>
+            </a:pPr>
+            <a:r>
+              <a:rPr sz="2000" b="1"/>
+              <a:t>Warning</a:t>
+            </a:r>
+          </a:p>
+          <a:p>
+            <a:pPr lvl="0" indent="0" marL="1270000">
+              <a:buNone/>
+            </a:pPr>
+            <a:r>
+              <a:rPr sz="2000" b="1"/>
+              <a:t>⚠️ Watch out!</a:t>
+            </a:r>
+          </a:p>
+          <a:p>
+            <a:pPr lvl="0" indent="0" marL="1270000">
+              <a:buNone/>
+            </a:pPr>
+            <a:r>
+              <a:rPr sz="2000">
+                <a:latin typeface="Courier"/>
+              </a:rPr>
+              <a:t>final.csv</a:t>
+            </a:r>
+            <a:r>
+              <a:rPr sz="2000"/>
+              <a:t>, </a:t>
+            </a:r>
+            <a:r>
+              <a:rPr sz="2000">
+                <a:latin typeface="Courier"/>
+              </a:rPr>
+              <a:t>final_v2.csv</a:t>
+            </a:r>
+            <a:r>
+              <a:rPr sz="2000"/>
+              <a:t>, </a:t>
+            </a:r>
+            <a:r>
+              <a:rPr sz="2000">
+                <a:latin typeface="Courier"/>
+              </a:rPr>
+              <a:t>final_FINAL.csv</a:t>
+            </a:r>
+            <a:r>
+              <a:rPr sz="2000"/>
+              <a:t> — this is exactly the mess a project folder with relative paths and clear names is meant to prevent.</a:t>
+            </a:r>
+          </a:p>
+        </p:txBody>
+      </p:sp>
+      <p:sp>
+        <p:nvSpPr>
+          <p:cNvPr id="4" name="Content Placeholder 3"/>
+          <p:cNvSpPr>
+            <a:spLocks noGrp="1"/>
+          </p:cNvSpPr>
+          <p:nvPr>
+            <p:ph idx="2" sz="half"/>
+          </p:nvPr>
+        </p:nvSpPr>
+        <p:spPr/>
+        <p:txBody>
+          <a:bodyPr/>
+          <a:lstStyle/>
+          <a:p>
+            <a:pPr lvl="0" indent="0" marL="1270000">
+              <a:buNone/>
+            </a:pPr>
+            <a:r>
+              <a:rPr sz="2000" b="1"/>
+              <a:t>Tip</a:t>
+            </a:r>
+          </a:p>
+          <a:p>
+            <a:pPr lvl="0" indent="0" marL="1270000">
+              <a:buNone/>
+            </a:pPr>
+            <a:r>
+              <a:rPr sz="2000" b="1"/>
+              <a:t>🖐 Try it yourself</a:t>
+            </a:r>
+          </a:p>
+          <a:p>
+            <a:pPr lvl="0" indent="0" marL="1270000">
+              <a:buNone/>
+            </a:pPr>
+            <a:r>
+              <a:rPr sz="2000"/>
+              <a:t>Predict what </a:t>
+            </a:r>
+            <a:r>
+              <a:rPr sz="2000">
+                <a:latin typeface="Courier"/>
+              </a:rPr>
+              <a:t>write_csv(pine_wrangled_df, "data/pine_needles_wrangled.csv")</a:t>
+            </a:r>
+            <a:r>
+              <a:rPr sz="2000"/>
+              <a:t> does if that file doesn’t exist yet. What if it already does?</a:t>
             </a:r>
           </a:p>
         </p:txBody>
@@ -6281,12 +6534,12 @@
       </p:grpSpPr>
       <p:sp>
         <p:nvSpPr>
-          <p:cNvPr id="3" name="Content Placeholder 2"/>
-          <p:cNvSpPr>
-            <a:spLocks noGrp="1"/>
-          </p:cNvSpPr>
-          <p:nvPr>
-            <p:ph idx="1" sz="half"/>
+          <p:cNvPr id="2" name="Title 1"/>
+          <p:cNvSpPr>
+            <a:spLocks noGrp="1"/>
+          </p:cNvSpPr>
+          <p:nvPr>
+            <p:ph type="title"/>
           </p:nvPr>
         </p:nvSpPr>
         <p:spPr/>
@@ -6294,44 +6547,158 @@
           <a:bodyPr/>
           <a:lstStyle/>
           <a:p>
-            <a:pPr lvl="0" indent="0">
-              <a:buNone/>
-            </a:pPr>
-            <a:r>
-              <a:rPr>
-                <a:solidFill>
-                  <a:srgbClr val="4758AB"/>
-                </a:solidFill>
-                <a:latin typeface="Courier"/>
-              </a:rPr>
-              <a:t>write_csv</a:t>
-            </a:r>
-            <a:r>
-              <a:rPr>
-                <a:solidFill>
-                  <a:srgbClr val="003B4F"/>
-                </a:solidFill>
-                <a:latin typeface="Courier"/>
-              </a:rPr>
-              <a:t>(pine_wrangled_df, </a:t>
-            </a:r>
-            <a:r>
-              <a:rPr>
-                <a:solidFill>
-                  <a:srgbClr val="20794D"/>
-                </a:solidFill>
-                <a:latin typeface="Courier"/>
-              </a:rPr>
-              <a:t>"data/pine_needles_wrangled.csv"</a:t>
-            </a:r>
-            <a:r>
-              <a:rPr>
-                <a:solidFill>
-                  <a:srgbClr val="003B4F"/>
-                </a:solidFill>
-                <a:latin typeface="Courier"/>
-              </a:rPr>
-              <a:t>)</a:t>
+            <a:pPr lvl="0" indent="0" marL="0">
+              <a:buNone/>
+            </a:pPr>
+            <a:r>
+              <a:rPr/>
+              <a:t>Wrap-up</a:t>
+            </a:r>
+          </a:p>
+        </p:txBody>
+      </p:sp>
+      <p:sp>
+        <p:nvSpPr>
+          <p:cNvPr id="3" name="Content Placeholder 2"/>
+          <p:cNvSpPr>
+            <a:spLocks noGrp="1"/>
+          </p:cNvSpPr>
+          <p:nvPr>
+            <p:ph idx="1" sz="half"/>
+          </p:nvPr>
+        </p:nvSpPr>
+        <p:spPr/>
+        <p:txBody>
+          <a:bodyPr/>
+          <a:lstStyle/>
+          <a:p>
+            <a:pPr lvl="0" indent="0" marL="0">
+              <a:buNone/>
+            </a:pPr>
+            <a:r>
+              <a:rPr/>
+              <a:t>Today you:</a:t>
+            </a:r>
+          </a:p>
+          <a:p>
+            <a:pPr lvl="0"/>
+            <a:r>
+              <a:rPr/>
+              <a:t>Imported the same data from a </a:t>
+            </a:r>
+            <a:r>
+              <a:rPr>
+                <a:latin typeface="Courier"/>
+              </a:rPr>
+              <a:t>.csv</a:t>
+            </a:r>
+            <a:r>
+              <a:rPr/>
+              <a:t> </a:t>
+            </a:r>
+            <a:r>
+              <a:rPr b="1"/>
+              <a:t>and</a:t>
+            </a:r>
+            <a:r>
+              <a:rPr/>
+              <a:t> an </a:t>
+            </a:r>
+            <a:r>
+              <a:rPr>
+                <a:latin typeface="Courier"/>
+              </a:rPr>
+              <a:t>.xlsx</a:t>
+            </a:r>
+          </a:p>
+          <a:p>
+            <a:pPr lvl="0"/>
+            <a:r>
+              <a:rPr/>
+              <a:t>Used </a:t>
+            </a:r>
+            <a:r>
+              <a:rPr>
+                <a:latin typeface="Courier"/>
+              </a:rPr>
+              <a:t>filter()</a:t>
+            </a:r>
+            <a:r>
+              <a:rPr/>
+              <a:t>, </a:t>
+            </a:r>
+            <a:r>
+              <a:rPr>
+                <a:latin typeface="Courier"/>
+              </a:rPr>
+              <a:t>select()</a:t>
+            </a:r>
+            <a:r>
+              <a:rPr/>
+              <a:t>, </a:t>
+            </a:r>
+            <a:r>
+              <a:rPr>
+                <a:latin typeface="Courier"/>
+              </a:rPr>
+              <a:t>mutate()</a:t>
+            </a:r>
+            <a:r>
+              <a:rPr/>
+              <a:t>, and </a:t>
+            </a:r>
+            <a:r>
+              <a:rPr>
+                <a:latin typeface="Courier"/>
+              </a:rPr>
+              <a:t>arrange()</a:t>
+            </a:r>
+            <a:r>
+              <a:rPr/>
+              <a:t> — and chained them into a pipeline</a:t>
+            </a:r>
+          </a:p>
+          <a:p>
+            <a:pPr lvl="0"/>
+            <a:r>
+              <a:rPr/>
+              <a:t>Converted units and log-transformed a column with </a:t>
+            </a:r>
+            <a:r>
+              <a:rPr>
+                <a:latin typeface="Courier"/>
+              </a:rPr>
+              <a:t>mutate()</a:t>
+            </a:r>
+          </a:p>
+          <a:p>
+            <a:pPr lvl="0"/>
+            <a:r>
+              <a:rPr/>
+              <a:t>Caught and removed duplicate rows with </a:t>
+            </a:r>
+            <a:r>
+              <a:rPr>
+                <a:latin typeface="Courier"/>
+              </a:rPr>
+              <a:t>distinct()</a:t>
+            </a:r>
+          </a:p>
+          <a:p>
+            <a:pPr lvl="0"/>
+            <a:r>
+              <a:rPr/>
+              <a:t>Saved a new file with </a:t>
+            </a:r>
+            <a:r>
+              <a:rPr>
+                <a:latin typeface="Courier"/>
+              </a:rPr>
+              <a:t>write_csv()</a:t>
+            </a:r>
+            <a:r>
+              <a:rPr/>
+              <a:t> without touching the raw data</a:t>
             </a:r>
           </a:p>
           <a:p>
@@ -6340,7 +6707,7 @@
             </a:pPr>
             <a:r>
               <a:rPr sz="2000" b="1"/>
-              <a:t>Important</a:t>
+              <a:t>Tip</a:t>
             </a:r>
           </a:p>
           <a:p>
@@ -6349,11 +6716,16 @@
             </a:pPr>
             <a:r>
               <a:rPr sz="2000" b="1"/>
-              <a:t>Raw data is read-only.</a:t>
-            </a:r>
+              <a:t>🖐 Before next class</a:t>
+            </a:r>
+          </a:p>
+          <a:p>
+            <a:pPr lvl="0" indent="0" marL="1270000">
+              <a:buNone/>
+            </a:pPr>
             <a:r>
               <a:rPr sz="2000"/>
-              <a:t> </a:t>
+              <a:t>Finish the worksheet: wrangle </a:t>
             </a:r>
             <a:r>
               <a:rPr sz="2000">
@@ -6363,41 +6735,13 @@
             </a:r>
             <a:r>
               <a:rPr sz="2000"/>
-              <a:t> never gets overwritten — </a:t>
+              <a:t> into a new data frame with at least one unit conversion and one log transform, then save it with </a:t>
             </a:r>
             <a:r>
               <a:rPr sz="2000">
                 <a:latin typeface="Courier"/>
               </a:rPr>
               <a:t>write_csv()</a:t>
-            </a:r>
-            <a:r>
-              <a:rPr sz="2000"/>
-              <a:t> always creates a </a:t>
-            </a:r>
-            <a:r>
-              <a:rPr sz="2000" b="1"/>
-              <a:t>new, separate file</a:t>
-            </a:r>
-            <a:r>
-              <a:rPr sz="2000"/>
-              <a:t>. That’s why we named it </a:t>
-            </a:r>
-            <a:r>
-              <a:rPr sz="2000">
-                <a:latin typeface="Courier"/>
-              </a:rPr>
-              <a:t>pine_needles_wrangled.csv</a:t>
-            </a:r>
-            <a:r>
-              <a:rPr sz="2000"/>
-              <a:t>, not </a:t>
-            </a:r>
-            <a:r>
-              <a:rPr sz="2000">
-                <a:latin typeface="Courier"/>
-              </a:rPr>
-              <a:t>pine_needles.csv</a:t>
             </a:r>
             <a:r>
               <a:rPr sz="2000"/>
@@ -6435,16 +6779,64 @@
             </a:pPr>
             <a:r>
               <a:rPr sz="2000" b="1"/>
-              <a:t>✅ Key idea</a:t>
-            </a:r>
-          </a:p>
-          <a:p>
-            <a:pPr lvl="0" indent="0" marL="1270000">
-              <a:buNone/>
-            </a:pPr>
+              <a:t>Up next — Module 3</a:t>
+            </a:r>
+          </a:p>
+          <a:p>
+            <a:pPr lvl="0"/>
             <a:r>
               <a:rPr sz="2000"/>
-              <a:t>If you can’t reproduce a result from raw data + a script, something’s wrong with the script — never with the raw file. Keeping raw data untouched is what makes that guarantee possible.</a:t>
+              <a:t>Mean, median, variance, SD, SE</a:t>
+            </a:r>
+          </a:p>
+          <a:p>
+            <a:pPr lvl="0"/>
+            <a:r>
+              <a:rPr sz="2000"/>
+              <a:t>The </a:t>
+            </a:r>
+            <a:r>
+              <a:rPr sz="2000">
+                <a:latin typeface="Courier"/>
+              </a:rPr>
+              <a:t>length()</a:t>
+            </a:r>
+            <a:r>
+              <a:rPr sz="2000"/>
+              <a:t> trap and the </a:t>
+            </a:r>
+            <a:r>
+              <a:rPr sz="2000">
+                <a:latin typeface="Courier"/>
+              </a:rPr>
+              <a:t>sum(!is.na())</a:t>
+            </a:r>
+            <a:r>
+              <a:rPr sz="2000"/>
+              <a:t> fix</a:t>
+            </a:r>
+          </a:p>
+          <a:p>
+            <a:pPr lvl="0"/>
+            <a:r>
+              <a:rPr sz="2000">
+                <a:latin typeface="Courier"/>
+              </a:rPr>
+              <a:t>group_by()</a:t>
+            </a:r>
+            <a:r>
+              <a:rPr sz="2000"/>
+              <a:t> + </a:t>
+            </a:r>
+            <a:r>
+              <a:rPr sz="2000">
+                <a:latin typeface="Courier"/>
+              </a:rPr>
+              <a:t>summarize()</a:t>
+            </a:r>
+            <a:r>
+              <a:rPr sz="2000"/>
+              <a:t> for tidy group comparisons</a:t>
             </a:r>
           </a:p>
         </p:txBody>
@@ -6473,12 +6865,12 @@
       </p:grpSpPr>
       <p:sp>
         <p:nvSpPr>
-          <p:cNvPr id="3" name="Content Placeholder 2"/>
-          <p:cNvSpPr>
-            <a:spLocks noGrp="1"/>
-          </p:cNvSpPr>
-          <p:nvPr>
-            <p:ph idx="1"/>
+          <p:cNvPr id="2" name="Title 1"/>
+          <p:cNvSpPr>
+            <a:spLocks noGrp="1"/>
+          </p:cNvSpPr>
+          <p:nvPr>
+            <p:ph type="title"/>
           </p:nvPr>
         </p:nvSpPr>
         <p:spPr/>
@@ -6487,14 +6879,169 @@
           <a:lstStyle/>
           <a:p>
             <a:pPr lvl="0" indent="0" marL="0">
-              <a:spcBef>
-                <a:spcPts val="3000"/>
-              </a:spcBef>
-              <a:buNone/>
-            </a:pPr>
+              <a:buNone/>
+            </a:pPr>
+            <a:r>
+              <a:rPr/>
+              <a:t>Getting unstuck</a:t>
+            </a:r>
+          </a:p>
+        </p:txBody>
+      </p:sp>
+      <p:sp>
+        <p:nvSpPr>
+          <p:cNvPr id="3" name="Content Placeholder 2"/>
+          <p:cNvSpPr>
+            <a:spLocks noGrp="1"/>
+          </p:cNvSpPr>
+          <p:nvPr>
+            <p:ph idx="1"/>
+          </p:nvPr>
+        </p:nvSpPr>
+        <p:spPr/>
+        <p:txBody>
+          <a:bodyPr/>
+          <a:lstStyle/>
+          <a:p>
+            <a:pPr lvl="0" indent="0" marL="0">
+              <a:buNone/>
+            </a:pPr>
+            <a:r>
+              <a:rPr/>
+              <a:t>When code breaks — and it will, that is normal:</a:t>
+            </a:r>
+          </a:p>
+          <a:p>
+            <a:pPr lvl="0" indent="-342900" marL="342900">
+              <a:buAutoNum type="arabicPeriod"/>
+            </a:pPr>
+            <a:r>
+              <a:rPr/>
+              <a:t>Read the </a:t>
+            </a:r>
             <a:r>
               <a:rPr b="1"/>
-              <a:t>Naming your saved files</a:t>
+              <a:t>error message</a:t>
+            </a:r>
+            <a:r>
+              <a:rPr/>
+              <a:t> out loud; it usually names the line</a:t>
+            </a:r>
+          </a:p>
+          <a:p>
+            <a:pPr lvl="0" indent="-342900" marL="342900">
+              <a:buAutoNum type="arabicPeriod"/>
+            </a:pPr>
+            <a:r>
+              <a:rPr/>
+              <a:t>Check the usual suspects: </a:t>
+            </a:r>
+            <a:r>
+              <a:rPr>
+                <a:latin typeface="Courier"/>
+              </a:rPr>
+              <a:t>library(tidyverse)</a:t>
+            </a:r>
+            <a:r>
+              <a:rPr/>
+              <a:t> and </a:t>
+            </a:r>
+            <a:r>
+              <a:rPr>
+                <a:latin typeface="Courier"/>
+              </a:rPr>
+              <a:t>library(readxl)</a:t>
+            </a:r>
+            <a:r>
+              <a:rPr/>
+              <a:t> loaded? Spelling? A missing </a:t>
+            </a:r>
+            <a:r>
+              <a:rPr>
+                <a:latin typeface="Courier"/>
+              </a:rPr>
+              <a:t>)</a:t>
+            </a:r>
+            <a:r>
+              <a:rPr/>
+              <a:t> or </a:t>
+            </a:r>
+            <a:r>
+              <a:rPr>
+                <a:latin typeface="Courier"/>
+              </a:rPr>
+              <a:t>|&gt;</a:t>
+            </a:r>
+            <a:r>
+              <a:rPr/>
+              <a:t> at the </a:t>
+            </a:r>
+            <a:r>
+              <a:rPr i="1"/>
+              <a:t>start</a:t>
+            </a:r>
+            <a:r>
+              <a:rPr/>
+              <a:t> of a line?</a:t>
+            </a:r>
+          </a:p>
+          <a:p>
+            <a:pPr lvl="0" indent="-342900" marL="342900">
+              <a:buAutoNum type="arabicPeriod"/>
+            </a:pPr>
+            <a:r>
+              <a:rPr>
+                <a:latin typeface="Courier"/>
+              </a:rPr>
+              <a:t>?function_name</a:t>
+            </a:r>
+            <a:r>
+              <a:rPr/>
+              <a:t> opens the help page</a:t>
+            </a:r>
+          </a:p>
+          <a:p>
+            <a:pPr lvl="0" indent="-342900" marL="342900">
+              <a:buAutoNum type="arabicPeriod"/>
+            </a:pPr>
+            <a:r>
+              <a:rPr/>
+              <a:t>Bring the </a:t>
+            </a:r>
+            <a:r>
+              <a:rPr b="1"/>
+              <a:t>exact error</a:t>
+            </a:r>
+            <a:r>
+              <a:rPr/>
+              <a:t> (copy-paste it) to class or office hours</a:t>
+            </a:r>
+          </a:p>
+          <a:p>
+            <a:pPr lvl="0" indent="0" marL="1270000">
+              <a:buNone/>
+            </a:pPr>
+            <a:r>
+              <a:rPr sz="2000" b="1"/>
+              <a:t>Note</a:t>
+            </a:r>
+          </a:p>
+          <a:p>
+            <a:pPr lvl="0" indent="0" marL="1270000">
+              <a:buNone/>
+            </a:pPr>
+            <a:r>
+              <a:rPr sz="2000" b="1"/>
+              <a:t>✅ Key idea</a:t>
+            </a:r>
+          </a:p>
+          <a:p>
+            <a:pPr lvl="0" indent="0" marL="1270000">
+              <a:buNone/>
+            </a:pPr>
+            <a:r>
+              <a:rPr sz="2000"/>
+              <a:t>Every working scientist googles error messages daily. Getting stuck is not failing — it is the job.</a:t>
             </a:r>
           </a:p>
         </p:txBody>
@@ -6789,743 +7336,6 @@
 </p:sld>
 </file>
 
-<file path=ppt/slides/slide20.xml><?xml version="1.0" encoding="utf-8"?>
-<p:sld xmlns:a="http://schemas.openxmlformats.org/drawingml/2006/main" xmlns:r="http://schemas.openxmlformats.org/officeDocument/2006/relationships" xmlns:p="http://schemas.openxmlformats.org/presentationml/2006/main">
-  <p:cSld>
-    <p:spTree>
-      <p:nvGrpSpPr>
-        <p:cNvPr id="1" name=""/>
-        <p:cNvGrpSpPr/>
-        <p:nvPr/>
-      </p:nvGrpSpPr>
-      <p:grpSpPr>
-        <a:xfrm>
-          <a:off x="0" y="0"/>
-          <a:ext cx="0" cy="0"/>
-          <a:chOff x="0" y="0"/>
-          <a:chExt cx="0" cy="0"/>
-        </a:xfrm>
-      </p:grpSpPr>
-      <p:sp>
-        <p:nvSpPr>
-          <p:cNvPr id="3" name="Content Placeholder 2"/>
-          <p:cNvSpPr>
-            <a:spLocks noGrp="1"/>
-          </p:cNvSpPr>
-          <p:nvPr>
-            <p:ph idx="1" sz="half"/>
-          </p:nvPr>
-        </p:nvSpPr>
-        <p:spPr/>
-        <p:txBody>
-          <a:bodyPr/>
-          <a:lstStyle/>
-          <a:p>
-            <a:pPr lvl="0"/>
-            <a:r>
-              <a:rPr/>
-              <a:t>Never overwrite </a:t>
-            </a:r>
-            <a:r>
-              <a:rPr>
-                <a:latin typeface="Courier"/>
-              </a:rPr>
-              <a:t>data/pine_needles.csv</a:t>
-            </a:r>
-            <a:r>
-              <a:rPr/>
-              <a:t> — that file is raw</a:t>
-            </a:r>
-          </a:p>
-          <a:p>
-            <a:pPr lvl="0"/>
-            <a:r>
-              <a:rPr/>
-              <a:t>Save wrangled output with a name that says what happened: </a:t>
-            </a:r>
-            <a:r>
-              <a:rPr>
-                <a:latin typeface="Courier"/>
-              </a:rPr>
-              <a:t>pine_needles_wrangled.csv</a:t>
-            </a:r>
-            <a:r>
-              <a:rPr/>
-              <a:t>, not </a:t>
-            </a:r>
-            <a:r>
-              <a:rPr>
-                <a:latin typeface="Courier"/>
-              </a:rPr>
-              <a:t>pine_needles2.csv</a:t>
-            </a:r>
-            <a:r>
-              <a:rPr/>
-              <a:t> or </a:t>
-            </a:r>
-            <a:r>
-              <a:rPr>
-                <a:latin typeface="Courier"/>
-              </a:rPr>
-              <a:t>final.csv</a:t>
-            </a:r>
-          </a:p>
-          <a:p>
-            <a:pPr lvl="0"/>
-            <a:r>
-              <a:rPr/>
-              <a:t>Anyone re-running your script from scratch should get the exact same output file</a:t>
-            </a:r>
-          </a:p>
-          <a:p>
-            <a:pPr lvl="0" indent="0" marL="1270000">
-              <a:buNone/>
-            </a:pPr>
-            <a:r>
-              <a:rPr sz="2000" b="1"/>
-              <a:t>Warning</a:t>
-            </a:r>
-          </a:p>
-          <a:p>
-            <a:pPr lvl="0" indent="0" marL="1270000">
-              <a:buNone/>
-            </a:pPr>
-            <a:r>
-              <a:rPr sz="2000" b="1"/>
-              <a:t>⚠️ Watch out!</a:t>
-            </a:r>
-          </a:p>
-          <a:p>
-            <a:pPr lvl="0" indent="0" marL="1270000">
-              <a:buNone/>
-            </a:pPr>
-            <a:r>
-              <a:rPr sz="2000">
-                <a:latin typeface="Courier"/>
-              </a:rPr>
-              <a:t>final.csv</a:t>
-            </a:r>
-            <a:r>
-              <a:rPr sz="2000"/>
-              <a:t>, </a:t>
-            </a:r>
-            <a:r>
-              <a:rPr sz="2000">
-                <a:latin typeface="Courier"/>
-              </a:rPr>
-              <a:t>final_v2.csv</a:t>
-            </a:r>
-            <a:r>
-              <a:rPr sz="2000"/>
-              <a:t>, </a:t>
-            </a:r>
-            <a:r>
-              <a:rPr sz="2000">
-                <a:latin typeface="Courier"/>
-              </a:rPr>
-              <a:t>final_FINAL.csv</a:t>
-            </a:r>
-            <a:r>
-              <a:rPr sz="2000"/>
-              <a:t> — this is exactly the mess a project folder with relative paths and clear names is meant to prevent.</a:t>
-            </a:r>
-          </a:p>
-        </p:txBody>
-      </p:sp>
-      <p:sp>
-        <p:nvSpPr>
-          <p:cNvPr id="4" name="Content Placeholder 3"/>
-          <p:cNvSpPr>
-            <a:spLocks noGrp="1"/>
-          </p:cNvSpPr>
-          <p:nvPr>
-            <p:ph idx="2" sz="half"/>
-          </p:nvPr>
-        </p:nvSpPr>
-        <p:spPr/>
-        <p:txBody>
-          <a:bodyPr/>
-          <a:lstStyle/>
-          <a:p>
-            <a:pPr lvl="0" indent="0" marL="1270000">
-              <a:buNone/>
-            </a:pPr>
-            <a:r>
-              <a:rPr sz="2000" b="1"/>
-              <a:t>Tip</a:t>
-            </a:r>
-          </a:p>
-          <a:p>
-            <a:pPr lvl="0" indent="0" marL="1270000">
-              <a:buNone/>
-            </a:pPr>
-            <a:r>
-              <a:rPr sz="2000" b="1"/>
-              <a:t>🖐 Try it yourself</a:t>
-            </a:r>
-          </a:p>
-          <a:p>
-            <a:pPr lvl="0" indent="0" marL="1270000">
-              <a:buNone/>
-            </a:pPr>
-            <a:r>
-              <a:rPr sz="2000"/>
-              <a:t>Predict what </a:t>
-            </a:r>
-            <a:r>
-              <a:rPr sz="2000">
-                <a:latin typeface="Courier"/>
-              </a:rPr>
-              <a:t>write_csv(pine_wrangled_df, "data/pine_needles_wrangled.csv")</a:t>
-            </a:r>
-            <a:r>
-              <a:rPr sz="2000"/>
-              <a:t> does if that file doesn’t exist yet. What if it already does?</a:t>
-            </a:r>
-          </a:p>
-        </p:txBody>
-      </p:sp>
-    </p:spTree>
-  </p:cSld>
-</p:sld>
-</file>
-
-<file path=ppt/slides/slide21.xml><?xml version="1.0" encoding="utf-8"?>
-<p:sld xmlns:a="http://schemas.openxmlformats.org/drawingml/2006/main" xmlns:r="http://schemas.openxmlformats.org/officeDocument/2006/relationships" xmlns:p="http://schemas.openxmlformats.org/presentationml/2006/main">
-  <p:cSld>
-    <p:spTree>
-      <p:nvGrpSpPr>
-        <p:cNvPr id="1" name=""/>
-        <p:cNvGrpSpPr/>
-        <p:nvPr/>
-      </p:nvGrpSpPr>
-      <p:grpSpPr>
-        <a:xfrm>
-          <a:off x="0" y="0"/>
-          <a:ext cx="0" cy="0"/>
-          <a:chOff x="0" y="0"/>
-          <a:chExt cx="0" cy="0"/>
-        </a:xfrm>
-      </p:grpSpPr>
-      <p:sp>
-        <p:nvSpPr>
-          <p:cNvPr id="2" name="Title 1"/>
-          <p:cNvSpPr>
-            <a:spLocks noGrp="1"/>
-          </p:cNvSpPr>
-          <p:nvPr>
-            <p:ph type="title"/>
-          </p:nvPr>
-        </p:nvSpPr>
-        <p:spPr/>
-        <p:txBody>
-          <a:bodyPr/>
-          <a:lstStyle/>
-          <a:p>
-            <a:pPr lvl="0" indent="0" marL="0">
-              <a:buNone/>
-            </a:pPr>
-            <a:r>
-              <a:rPr/>
-              <a:t>Wrap-up</a:t>
-            </a:r>
-          </a:p>
-        </p:txBody>
-      </p:sp>
-      <p:sp>
-        <p:nvSpPr>
-          <p:cNvPr id="3" name="Content Placeholder 2"/>
-          <p:cNvSpPr>
-            <a:spLocks noGrp="1"/>
-          </p:cNvSpPr>
-          <p:nvPr>
-            <p:ph idx="1" sz="half"/>
-          </p:nvPr>
-        </p:nvSpPr>
-        <p:spPr/>
-        <p:txBody>
-          <a:bodyPr/>
-          <a:lstStyle/>
-          <a:p>
-            <a:pPr lvl="0" indent="0" marL="0">
-              <a:buNone/>
-            </a:pPr>
-            <a:r>
-              <a:rPr/>
-              <a:t>Today you:</a:t>
-            </a:r>
-          </a:p>
-          <a:p>
-            <a:pPr lvl="0"/>
-            <a:r>
-              <a:rPr/>
-              <a:t>Imported the same data from a </a:t>
-            </a:r>
-            <a:r>
-              <a:rPr>
-                <a:latin typeface="Courier"/>
-              </a:rPr>
-              <a:t>.csv</a:t>
-            </a:r>
-            <a:r>
-              <a:rPr/>
-              <a:t> </a:t>
-            </a:r>
-            <a:r>
-              <a:rPr b="1"/>
-              <a:t>and</a:t>
-            </a:r>
-            <a:r>
-              <a:rPr/>
-              <a:t> an </a:t>
-            </a:r>
-            <a:r>
-              <a:rPr>
-                <a:latin typeface="Courier"/>
-              </a:rPr>
-              <a:t>.xlsx</a:t>
-            </a:r>
-          </a:p>
-          <a:p>
-            <a:pPr lvl="0"/>
-            <a:r>
-              <a:rPr/>
-              <a:t>Used </a:t>
-            </a:r>
-            <a:r>
-              <a:rPr>
-                <a:latin typeface="Courier"/>
-              </a:rPr>
-              <a:t>filter()</a:t>
-            </a:r>
-            <a:r>
-              <a:rPr/>
-              <a:t>, </a:t>
-            </a:r>
-            <a:r>
-              <a:rPr>
-                <a:latin typeface="Courier"/>
-              </a:rPr>
-              <a:t>select()</a:t>
-            </a:r>
-            <a:r>
-              <a:rPr/>
-              <a:t>, </a:t>
-            </a:r>
-            <a:r>
-              <a:rPr>
-                <a:latin typeface="Courier"/>
-              </a:rPr>
-              <a:t>mutate()</a:t>
-            </a:r>
-            <a:r>
-              <a:rPr/>
-              <a:t>, and </a:t>
-            </a:r>
-            <a:r>
-              <a:rPr>
-                <a:latin typeface="Courier"/>
-              </a:rPr>
-              <a:t>arrange()</a:t>
-            </a:r>
-            <a:r>
-              <a:rPr/>
-              <a:t> — and chained them into a pipeline</a:t>
-            </a:r>
-          </a:p>
-          <a:p>
-            <a:pPr lvl="0"/>
-            <a:r>
-              <a:rPr/>
-              <a:t>Converted units and log-transformed a column with </a:t>
-            </a:r>
-            <a:r>
-              <a:rPr>
-                <a:latin typeface="Courier"/>
-              </a:rPr>
-              <a:t>mutate()</a:t>
-            </a:r>
-          </a:p>
-          <a:p>
-            <a:pPr lvl="0"/>
-            <a:r>
-              <a:rPr/>
-              <a:t>Caught and removed duplicate rows with </a:t>
-            </a:r>
-            <a:r>
-              <a:rPr>
-                <a:latin typeface="Courier"/>
-              </a:rPr>
-              <a:t>distinct()</a:t>
-            </a:r>
-          </a:p>
-          <a:p>
-            <a:pPr lvl="0"/>
-            <a:r>
-              <a:rPr/>
-              <a:t>Saved a new file with </a:t>
-            </a:r>
-            <a:r>
-              <a:rPr>
-                <a:latin typeface="Courier"/>
-              </a:rPr>
-              <a:t>write_csv()</a:t>
-            </a:r>
-            <a:r>
-              <a:rPr/>
-              <a:t> without touching the raw data</a:t>
-            </a:r>
-          </a:p>
-          <a:p>
-            <a:pPr lvl="0" indent="0" marL="1270000">
-              <a:buNone/>
-            </a:pPr>
-            <a:r>
-              <a:rPr sz="2000" b="1"/>
-              <a:t>Tip</a:t>
-            </a:r>
-          </a:p>
-          <a:p>
-            <a:pPr lvl="0" indent="0" marL="1270000">
-              <a:buNone/>
-            </a:pPr>
-            <a:r>
-              <a:rPr sz="2000" b="1"/>
-              <a:t>🖐 Before next class</a:t>
-            </a:r>
-          </a:p>
-          <a:p>
-            <a:pPr lvl="0" indent="0" marL="1270000">
-              <a:buNone/>
-            </a:pPr>
-            <a:r>
-              <a:rPr sz="2000"/>
-              <a:t>Finish the worksheet: wrangle </a:t>
-            </a:r>
-            <a:r>
-              <a:rPr sz="2000">
-                <a:latin typeface="Courier"/>
-              </a:rPr>
-              <a:t>pine_needles.csv</a:t>
-            </a:r>
-            <a:r>
-              <a:rPr sz="2000"/>
-              <a:t> into a new data frame with at least one unit conversion and one log transform, then save it with </a:t>
-            </a:r>
-            <a:r>
-              <a:rPr sz="2000">
-                <a:latin typeface="Courier"/>
-              </a:rPr>
-              <a:t>write_csv()</a:t>
-            </a:r>
-            <a:r>
-              <a:rPr sz="2000"/>
-              <a:t>.</a:t>
-            </a:r>
-          </a:p>
-        </p:txBody>
-      </p:sp>
-      <p:sp>
-        <p:nvSpPr>
-          <p:cNvPr id="4" name="Content Placeholder 3"/>
-          <p:cNvSpPr>
-            <a:spLocks noGrp="1"/>
-          </p:cNvSpPr>
-          <p:nvPr>
-            <p:ph idx="2" sz="half"/>
-          </p:nvPr>
-        </p:nvSpPr>
-        <p:spPr/>
-        <p:txBody>
-          <a:bodyPr/>
-          <a:lstStyle/>
-          <a:p>
-            <a:pPr lvl="0" indent="0" marL="1270000">
-              <a:buNone/>
-            </a:pPr>
-            <a:r>
-              <a:rPr sz="2000" b="1"/>
-              <a:t>Note</a:t>
-            </a:r>
-          </a:p>
-          <a:p>
-            <a:pPr lvl="0" indent="0" marL="1270000">
-              <a:buNone/>
-            </a:pPr>
-            <a:r>
-              <a:rPr sz="2000" b="1"/>
-              <a:t>Up next — Module 3</a:t>
-            </a:r>
-          </a:p>
-          <a:p>
-            <a:pPr lvl="0"/>
-            <a:r>
-              <a:rPr sz="2000"/>
-              <a:t>Mean, median, variance, SD, SE</a:t>
-            </a:r>
-          </a:p>
-          <a:p>
-            <a:pPr lvl="0"/>
-            <a:r>
-              <a:rPr sz="2000"/>
-              <a:t>The </a:t>
-            </a:r>
-            <a:r>
-              <a:rPr sz="2000">
-                <a:latin typeface="Courier"/>
-              </a:rPr>
-              <a:t>length()</a:t>
-            </a:r>
-            <a:r>
-              <a:rPr sz="2000"/>
-              <a:t> trap and the </a:t>
-            </a:r>
-            <a:r>
-              <a:rPr sz="2000">
-                <a:latin typeface="Courier"/>
-              </a:rPr>
-              <a:t>sum(!is.na())</a:t>
-            </a:r>
-            <a:r>
-              <a:rPr sz="2000"/>
-              <a:t> fix</a:t>
-            </a:r>
-          </a:p>
-          <a:p>
-            <a:pPr lvl="0"/>
-            <a:r>
-              <a:rPr sz="2000">
-                <a:latin typeface="Courier"/>
-              </a:rPr>
-              <a:t>group_by()</a:t>
-            </a:r>
-            <a:r>
-              <a:rPr sz="2000"/>
-              <a:t> + </a:t>
-            </a:r>
-            <a:r>
-              <a:rPr sz="2000">
-                <a:latin typeface="Courier"/>
-              </a:rPr>
-              <a:t>summarize()</a:t>
-            </a:r>
-            <a:r>
-              <a:rPr sz="2000"/>
-              <a:t> for tidy group comparisons</a:t>
-            </a:r>
-          </a:p>
-        </p:txBody>
-      </p:sp>
-    </p:spTree>
-  </p:cSld>
-</p:sld>
-</file>
-
-<file path=ppt/slides/slide22.xml><?xml version="1.0" encoding="utf-8"?>
-<p:sld xmlns:a="http://schemas.openxmlformats.org/drawingml/2006/main" xmlns:r="http://schemas.openxmlformats.org/officeDocument/2006/relationships" xmlns:p="http://schemas.openxmlformats.org/presentationml/2006/main">
-  <p:cSld>
-    <p:spTree>
-      <p:nvGrpSpPr>
-        <p:cNvPr id="1" name=""/>
-        <p:cNvGrpSpPr/>
-        <p:nvPr/>
-      </p:nvGrpSpPr>
-      <p:grpSpPr>
-        <a:xfrm>
-          <a:off x="0" y="0"/>
-          <a:ext cx="0" cy="0"/>
-          <a:chOff x="0" y="0"/>
-          <a:chExt cx="0" cy="0"/>
-        </a:xfrm>
-      </p:grpSpPr>
-      <p:sp>
-        <p:nvSpPr>
-          <p:cNvPr id="2" name="Title 1"/>
-          <p:cNvSpPr>
-            <a:spLocks noGrp="1"/>
-          </p:cNvSpPr>
-          <p:nvPr>
-            <p:ph type="title"/>
-          </p:nvPr>
-        </p:nvSpPr>
-        <p:spPr/>
-        <p:txBody>
-          <a:bodyPr/>
-          <a:lstStyle/>
-          <a:p>
-            <a:pPr lvl="0" indent="0" marL="0">
-              <a:buNone/>
-            </a:pPr>
-            <a:r>
-              <a:rPr/>
-              <a:t>Getting unstuck</a:t>
-            </a:r>
-          </a:p>
-        </p:txBody>
-      </p:sp>
-      <p:sp>
-        <p:nvSpPr>
-          <p:cNvPr id="3" name="Content Placeholder 2"/>
-          <p:cNvSpPr>
-            <a:spLocks noGrp="1"/>
-          </p:cNvSpPr>
-          <p:nvPr>
-            <p:ph idx="1"/>
-          </p:nvPr>
-        </p:nvSpPr>
-        <p:spPr/>
-        <p:txBody>
-          <a:bodyPr/>
-          <a:lstStyle/>
-          <a:p>
-            <a:pPr lvl="0" indent="0" marL="0">
-              <a:buNone/>
-            </a:pPr>
-            <a:r>
-              <a:rPr/>
-              <a:t>When code breaks — and it will, that is normal:</a:t>
-            </a:r>
-          </a:p>
-          <a:p>
-            <a:pPr lvl="0" indent="-342900" marL="342900">
-              <a:buAutoNum type="arabicPeriod"/>
-            </a:pPr>
-            <a:r>
-              <a:rPr/>
-              <a:t>Read the </a:t>
-            </a:r>
-            <a:r>
-              <a:rPr b="1"/>
-              <a:t>error message</a:t>
-            </a:r>
-            <a:r>
-              <a:rPr/>
-              <a:t> out loud; it usually names the line</a:t>
-            </a:r>
-          </a:p>
-          <a:p>
-            <a:pPr lvl="0" indent="-342900" marL="342900">
-              <a:buAutoNum type="arabicPeriod"/>
-            </a:pPr>
-            <a:r>
-              <a:rPr/>
-              <a:t>Check the usual suspects: </a:t>
-            </a:r>
-            <a:r>
-              <a:rPr>
-                <a:latin typeface="Courier"/>
-              </a:rPr>
-              <a:t>library(tidyverse)</a:t>
-            </a:r>
-            <a:r>
-              <a:rPr/>
-              <a:t> and </a:t>
-            </a:r>
-            <a:r>
-              <a:rPr>
-                <a:latin typeface="Courier"/>
-              </a:rPr>
-              <a:t>library(readxl)</a:t>
-            </a:r>
-            <a:r>
-              <a:rPr/>
-              <a:t> loaded? Spelling? A missing </a:t>
-            </a:r>
-            <a:r>
-              <a:rPr>
-                <a:latin typeface="Courier"/>
-              </a:rPr>
-              <a:t>)</a:t>
-            </a:r>
-            <a:r>
-              <a:rPr/>
-              <a:t> or </a:t>
-            </a:r>
-            <a:r>
-              <a:rPr>
-                <a:latin typeface="Courier"/>
-              </a:rPr>
-              <a:t>|&gt;</a:t>
-            </a:r>
-            <a:r>
-              <a:rPr/>
-              <a:t> at the </a:t>
-            </a:r>
-            <a:r>
-              <a:rPr i="1"/>
-              <a:t>start</a:t>
-            </a:r>
-            <a:r>
-              <a:rPr/>
-              <a:t> of a line?</a:t>
-            </a:r>
-          </a:p>
-          <a:p>
-            <a:pPr lvl="0" indent="-342900" marL="342900">
-              <a:buAutoNum type="arabicPeriod"/>
-            </a:pPr>
-            <a:r>
-              <a:rPr>
-                <a:latin typeface="Courier"/>
-              </a:rPr>
-              <a:t>?function_name</a:t>
-            </a:r>
-            <a:r>
-              <a:rPr/>
-              <a:t> opens the help page</a:t>
-            </a:r>
-          </a:p>
-          <a:p>
-            <a:pPr lvl="0" indent="-342900" marL="342900">
-              <a:buAutoNum type="arabicPeriod"/>
-            </a:pPr>
-            <a:r>
-              <a:rPr/>
-              <a:t>Bring the </a:t>
-            </a:r>
-            <a:r>
-              <a:rPr b="1"/>
-              <a:t>exact error</a:t>
-            </a:r>
-            <a:r>
-              <a:rPr/>
-              <a:t> (copy-paste it) to class or office hours</a:t>
-            </a:r>
-          </a:p>
-          <a:p>
-            <a:pPr lvl="0" indent="0" marL="1270000">
-              <a:buNone/>
-            </a:pPr>
-            <a:r>
-              <a:rPr sz="2000" b="1"/>
-              <a:t>Note</a:t>
-            </a:r>
-          </a:p>
-          <a:p>
-            <a:pPr lvl="0" indent="0" marL="1270000">
-              <a:buNone/>
-            </a:pPr>
-            <a:r>
-              <a:rPr sz="2000" b="1"/>
-              <a:t>✅ Key idea</a:t>
-            </a:r>
-          </a:p>
-          <a:p>
-            <a:pPr lvl="0" indent="0" marL="1270000">
-              <a:buNone/>
-            </a:pPr>
-            <a:r>
-              <a:rPr sz="2000"/>
-              <a:t>Every working scientist googles error messages daily. Getting stuck is not failing — it is the job.</a:t>
-            </a:r>
-          </a:p>
-        </p:txBody>
-      </p:sp>
-    </p:spTree>
-  </p:cSld>
-</p:sld>
-</file>
-
 <file path=ppt/slides/slide3.xml><?xml version="1.0" encoding="utf-8"?>
 <p:sld xmlns:a="http://schemas.openxmlformats.org/drawingml/2006/main" xmlns:r="http://schemas.openxmlformats.org/officeDocument/2006/relationships" xmlns:p="http://schemas.openxmlformats.org/presentationml/2006/main">
   <p:cSld>
@@ -8001,12 +7811,12 @@
       </p:grpSpPr>
       <p:sp>
         <p:nvSpPr>
-          <p:cNvPr id="3" name="Content Placeholder 2"/>
-          <p:cNvSpPr>
-            <a:spLocks noGrp="1"/>
-          </p:cNvSpPr>
-          <p:nvPr>
-            <p:ph idx="1"/>
+          <p:cNvPr id="2" name="Title 1"/>
+          <p:cNvSpPr>
+            <a:spLocks noGrp="1"/>
+          </p:cNvSpPr>
+          <p:nvPr>
+            <p:ph type="title"/>
           </p:nvPr>
         </p:nvSpPr>
         <p:spPr/>
@@ -8015,40 +7825,15 @@
           <a:lstStyle/>
           <a:p>
             <a:pPr lvl="0" indent="0" marL="0">
-              <a:spcBef>
-                <a:spcPts val="3000"/>
-              </a:spcBef>
-              <a:buNone/>
-            </a:pPr>
-            <a:r>
-              <a:rPr b="1"/>
+              <a:buNone/>
+            </a:pPr>
+            <a:r>
+              <a:rPr/>
               <a:t>Look before you trust it — every time</a:t>
             </a:r>
           </a:p>
         </p:txBody>
       </p:sp>
-    </p:spTree>
-  </p:cSld>
-</p:sld>
-</file>
-
-<file path=ppt/slides/slide6.xml><?xml version="1.0" encoding="utf-8"?>
-<p:sld xmlns:a="http://schemas.openxmlformats.org/drawingml/2006/main" xmlns:r="http://schemas.openxmlformats.org/officeDocument/2006/relationships" xmlns:p="http://schemas.openxmlformats.org/presentationml/2006/main">
-  <p:cSld>
-    <p:spTree>
-      <p:nvGrpSpPr>
-        <p:cNvPr id="1" name=""/>
-        <p:cNvGrpSpPr/>
-        <p:nvPr/>
-      </p:nvGrpSpPr>
-      <p:grpSpPr>
-        <a:xfrm>
-          <a:off x="0" y="0"/>
-          <a:ext cx="0" cy="0"/>
-          <a:chOff x="0" y="0"/>
-          <a:chExt cx="0" cy="0"/>
-        </a:xfrm>
-      </p:grpSpPr>
       <p:sp>
         <p:nvSpPr>
           <p:cNvPr id="3" name="Content Placeholder 2"/>
@@ -8335,7 +8120,7 @@
 </p:sld>
 </file>
 
-<file path=ppt/slides/slide7.xml><?xml version="1.0" encoding="utf-8"?>
+<file path=ppt/slides/slide6.xml><?xml version="1.0" encoding="utf-8"?>
 <p:sld xmlns:a="http://schemas.openxmlformats.org/drawingml/2006/main" xmlns:r="http://schemas.openxmlformats.org/officeDocument/2006/relationships" xmlns:p="http://schemas.openxmlformats.org/presentationml/2006/main">
   <p:cSld>
     <p:spTree>
@@ -8807,7 +8592,7 @@
 </p:sld>
 </file>
 
-<file path=ppt/slides/slide8.xml><?xml version="1.0" encoding="utf-8"?>
+<file path=ppt/slides/slide7.xml><?xml version="1.0" encoding="utf-8"?>
 <p:sld xmlns:a="http://schemas.openxmlformats.org/drawingml/2006/main" xmlns:r="http://schemas.openxmlformats.org/officeDocument/2006/relationships" xmlns:p="http://schemas.openxmlformats.org/presentationml/2006/main">
   <p:cSld>
     <p:spTree>
@@ -9747,6 +9532,574 @@
 </p:sld>
 </file>
 
+<file path=ppt/slides/slide8.xml><?xml version="1.0" encoding="utf-8"?>
+<p:sld xmlns:a="http://schemas.openxmlformats.org/drawingml/2006/main" xmlns:r="http://schemas.openxmlformats.org/officeDocument/2006/relationships" xmlns:p="http://schemas.openxmlformats.org/presentationml/2006/main">
+  <p:cSld>
+    <p:spTree>
+      <p:nvGrpSpPr>
+        <p:cNvPr id="1" name=""/>
+        <p:cNvGrpSpPr/>
+        <p:nvPr/>
+      </p:nvGrpSpPr>
+      <p:grpSpPr>
+        <a:xfrm>
+          <a:off x="0" y="0"/>
+          <a:ext cx="0" cy="0"/>
+          <a:chOff x="0" y="0"/>
+          <a:chExt cx="0" cy="0"/>
+        </a:xfrm>
+      </p:grpSpPr>
+      <p:sp>
+        <p:nvSpPr>
+          <p:cNvPr id="2" name="Title 1"/>
+          <p:cNvSpPr>
+            <a:spLocks noGrp="1"/>
+          </p:cNvSpPr>
+          <p:nvPr>
+            <p:ph type="title"/>
+          </p:nvPr>
+        </p:nvSpPr>
+        <p:spPr/>
+        <p:txBody>
+          <a:bodyPr/>
+          <a:lstStyle/>
+          <a:p>
+            <a:pPr lvl="0" indent="0" marL="0">
+              <a:buNone/>
+            </a:pPr>
+            <a:r>
+              <a:rPr>
+                <a:latin typeface="Courier"/>
+              </a:rPr>
+              <a:t>select()</a:t>
+            </a:r>
+            <a:r>
+              <a:rPr/>
+              <a:t> — Picking Columns</a:t>
+            </a:r>
+          </a:p>
+        </p:txBody>
+      </p:sp>
+      <p:sp>
+        <p:nvSpPr>
+          <p:cNvPr id="3" name="Content Placeholder 2"/>
+          <p:cNvSpPr>
+            <a:spLocks noGrp="1"/>
+          </p:cNvSpPr>
+          <p:nvPr>
+            <p:ph idx="1" sz="half"/>
+          </p:nvPr>
+        </p:nvSpPr>
+        <p:spPr/>
+        <p:txBody>
+          <a:bodyPr/>
+          <a:lstStyle/>
+          <a:p>
+            <a:pPr lvl="0" indent="0">
+              <a:buNone/>
+            </a:pPr>
+            <a:r>
+              <a:rPr>
+                <a:solidFill>
+                  <a:srgbClr val="5E5E5E"/>
+                </a:solidFill>
+                <a:latin typeface="Courier"/>
+              </a:rPr>
+              <a:t># Keep only side and length</a:t>
+            </a:r>
+            <a:br/>
+            <a:r>
+              <a:rPr>
+                <a:solidFill>
+                  <a:srgbClr val="003B4F"/>
+                </a:solidFill>
+                <a:latin typeface="Courier"/>
+              </a:rPr>
+              <a:t>pine_csv_df </a:t>
+            </a:r>
+            <a:r>
+              <a:rPr>
+                <a:solidFill>
+                  <a:srgbClr val="5E5E5E"/>
+                </a:solidFill>
+                <a:latin typeface="Courier"/>
+              </a:rPr>
+              <a:t>|&gt;</a:t>
+            </a:r>
+            <a:r>
+              <a:rPr>
+                <a:solidFill>
+                  <a:srgbClr val="003B4F"/>
+                </a:solidFill>
+                <a:latin typeface="Courier"/>
+              </a:rPr>
+              <a:t> </a:t>
+            </a:r>
+            <a:r>
+              <a:rPr>
+                <a:solidFill>
+                  <a:srgbClr val="4758AB"/>
+                </a:solidFill>
+                <a:latin typeface="Courier"/>
+              </a:rPr>
+              <a:t>select</a:t>
+            </a:r>
+            <a:r>
+              <a:rPr>
+                <a:solidFill>
+                  <a:srgbClr val="003B4F"/>
+                </a:solidFill>
+                <a:latin typeface="Courier"/>
+              </a:rPr>
+              <a:t>(n_s, length_mm) </a:t>
+            </a:r>
+            <a:r>
+              <a:rPr>
+                <a:solidFill>
+                  <a:srgbClr val="5E5E5E"/>
+                </a:solidFill>
+                <a:latin typeface="Courier"/>
+              </a:rPr>
+              <a:t>|&gt;</a:t>
+            </a:r>
+            <a:r>
+              <a:rPr>
+                <a:solidFill>
+                  <a:srgbClr val="003B4F"/>
+                </a:solidFill>
+                <a:latin typeface="Courier"/>
+              </a:rPr>
+              <a:t> </a:t>
+            </a:r>
+            <a:r>
+              <a:rPr>
+                <a:solidFill>
+                  <a:srgbClr val="4758AB"/>
+                </a:solidFill>
+                <a:latin typeface="Courier"/>
+              </a:rPr>
+              <a:t>head</a:t>
+            </a:r>
+            <a:r>
+              <a:rPr>
+                <a:solidFill>
+                  <a:srgbClr val="003B4F"/>
+                </a:solidFill>
+                <a:latin typeface="Courier"/>
+              </a:rPr>
+              <a:t>()</a:t>
+            </a:r>
+          </a:p>
+          <a:p>
+            <a:pPr lvl="0" indent="0">
+              <a:buNone/>
+            </a:pPr>
+            <a:r>
+              <a:rPr>
+                <a:latin typeface="Courier"/>
+              </a:rPr>
+              <a:t># A tibble: 6 × 2
+  n_s   length_mm
+  &lt;chr&gt;     &lt;dbl&gt;
+1 n            20
+2 n            21
+3 n            23
+4 n            25
+5 n            21
+6 n            16</a:t>
+            </a:r>
+          </a:p>
+          <a:p>
+            <a:pPr lvl="0" indent="0">
+              <a:buNone/>
+            </a:pPr>
+            <a:r>
+              <a:rPr>
+                <a:solidFill>
+                  <a:srgbClr val="5E5E5E"/>
+                </a:solidFill>
+                <a:latin typeface="Courier"/>
+              </a:rPr>
+              <a:t># Drop the date column (minus sign)</a:t>
+            </a:r>
+            <a:br/>
+            <a:r>
+              <a:rPr>
+                <a:solidFill>
+                  <a:srgbClr val="003B4F"/>
+                </a:solidFill>
+                <a:latin typeface="Courier"/>
+              </a:rPr>
+              <a:t>pine_csv_df </a:t>
+            </a:r>
+            <a:r>
+              <a:rPr>
+                <a:solidFill>
+                  <a:srgbClr val="5E5E5E"/>
+                </a:solidFill>
+                <a:latin typeface="Courier"/>
+              </a:rPr>
+              <a:t>|&gt;</a:t>
+            </a:r>
+            <a:r>
+              <a:rPr>
+                <a:solidFill>
+                  <a:srgbClr val="003B4F"/>
+                </a:solidFill>
+                <a:latin typeface="Courier"/>
+              </a:rPr>
+              <a:t> </a:t>
+            </a:r>
+            <a:r>
+              <a:rPr>
+                <a:solidFill>
+                  <a:srgbClr val="4758AB"/>
+                </a:solidFill>
+                <a:latin typeface="Courier"/>
+              </a:rPr>
+              <a:t>select</a:t>
+            </a:r>
+            <a:r>
+              <a:rPr>
+                <a:solidFill>
+                  <a:srgbClr val="003B4F"/>
+                </a:solidFill>
+                <a:latin typeface="Courier"/>
+              </a:rPr>
+              <a:t>(</a:t>
+            </a:r>
+            <a:r>
+              <a:rPr>
+                <a:solidFill>
+                  <a:srgbClr val="5E5E5E"/>
+                </a:solidFill>
+                <a:latin typeface="Courier"/>
+              </a:rPr>
+              <a:t>-</a:t>
+            </a:r>
+            <a:r>
+              <a:rPr>
+                <a:solidFill>
+                  <a:srgbClr val="003B4F"/>
+                </a:solidFill>
+                <a:latin typeface="Courier"/>
+              </a:rPr>
+              <a:t>date) </a:t>
+            </a:r>
+            <a:r>
+              <a:rPr>
+                <a:solidFill>
+                  <a:srgbClr val="5E5E5E"/>
+                </a:solidFill>
+                <a:latin typeface="Courier"/>
+              </a:rPr>
+              <a:t>|&gt;</a:t>
+            </a:r>
+            <a:r>
+              <a:rPr>
+                <a:solidFill>
+                  <a:srgbClr val="003B4F"/>
+                </a:solidFill>
+                <a:latin typeface="Courier"/>
+              </a:rPr>
+              <a:t> </a:t>
+            </a:r>
+            <a:r>
+              <a:rPr>
+                <a:solidFill>
+                  <a:srgbClr val="4758AB"/>
+                </a:solidFill>
+                <a:latin typeface="Courier"/>
+              </a:rPr>
+              <a:t>head</a:t>
+            </a:r>
+            <a:r>
+              <a:rPr>
+                <a:solidFill>
+                  <a:srgbClr val="003B4F"/>
+                </a:solidFill>
+                <a:latin typeface="Courier"/>
+              </a:rPr>
+              <a:t>()</a:t>
+            </a:r>
+          </a:p>
+          <a:p>
+            <a:pPr lvl="0" indent="0">
+              <a:buNone/>
+            </a:pPr>
+            <a:r>
+              <a:rPr>
+                <a:latin typeface="Courier"/>
+              </a:rPr>
+              <a:t># A tibble: 6 × 5
+  group       n_s   wind  tree_no length_mm
+  &lt;chr&gt;       &lt;chr&gt; &lt;chr&gt;   &lt;dbl&gt;     &lt;dbl&gt;
+1 cephalopods n     lee         1        20
+2 cephalopods n     lee         1        21
+3 cephalopods n     lee         1        23
+4 cephalopods n     lee         1        25
+5 cephalopods n     lee         1        21
+6 cephalopods n     lee         1        16</a:t>
+            </a:r>
+          </a:p>
+          <a:p>
+            <a:pPr lvl="0" indent="0">
+              <a:buNone/>
+            </a:pPr>
+            <a:r>
+              <a:rPr>
+                <a:solidFill>
+                  <a:srgbClr val="5E5E5E"/>
+                </a:solidFill>
+                <a:latin typeface="Courier"/>
+              </a:rPr>
+              <a:t># Keep columns that contain a word</a:t>
+            </a:r>
+            <a:br/>
+            <a:r>
+              <a:rPr>
+                <a:solidFill>
+                  <a:srgbClr val="003B4F"/>
+                </a:solidFill>
+                <a:latin typeface="Courier"/>
+              </a:rPr>
+              <a:t>pine_csv_df </a:t>
+            </a:r>
+            <a:r>
+              <a:rPr>
+                <a:solidFill>
+                  <a:srgbClr val="5E5E5E"/>
+                </a:solidFill>
+                <a:latin typeface="Courier"/>
+              </a:rPr>
+              <a:t>|&gt;</a:t>
+            </a:r>
+            <a:r>
+              <a:rPr>
+                <a:solidFill>
+                  <a:srgbClr val="003B4F"/>
+                </a:solidFill>
+                <a:latin typeface="Courier"/>
+              </a:rPr>
+              <a:t> </a:t>
+            </a:r>
+            <a:r>
+              <a:rPr>
+                <a:solidFill>
+                  <a:srgbClr val="4758AB"/>
+                </a:solidFill>
+                <a:latin typeface="Courier"/>
+              </a:rPr>
+              <a:t>select</a:t>
+            </a:r>
+            <a:r>
+              <a:rPr>
+                <a:solidFill>
+                  <a:srgbClr val="003B4F"/>
+                </a:solidFill>
+                <a:latin typeface="Courier"/>
+              </a:rPr>
+              <a:t>(</a:t>
+            </a:r>
+            <a:r>
+              <a:rPr>
+                <a:solidFill>
+                  <a:srgbClr val="4758AB"/>
+                </a:solidFill>
+                <a:latin typeface="Courier"/>
+              </a:rPr>
+              <a:t>contains</a:t>
+            </a:r>
+            <a:r>
+              <a:rPr>
+                <a:solidFill>
+                  <a:srgbClr val="003B4F"/>
+                </a:solidFill>
+                <a:latin typeface="Courier"/>
+              </a:rPr>
+              <a:t>(</a:t>
+            </a:r>
+            <a:r>
+              <a:rPr>
+                <a:solidFill>
+                  <a:srgbClr val="20794D"/>
+                </a:solidFill>
+                <a:latin typeface="Courier"/>
+              </a:rPr>
+              <a:t>"n"</a:t>
+            </a:r>
+            <a:r>
+              <a:rPr>
+                <a:solidFill>
+                  <a:srgbClr val="003B4F"/>
+                </a:solidFill>
+                <a:latin typeface="Courier"/>
+              </a:rPr>
+              <a:t>)) </a:t>
+            </a:r>
+            <a:r>
+              <a:rPr>
+                <a:solidFill>
+                  <a:srgbClr val="5E5E5E"/>
+                </a:solidFill>
+                <a:latin typeface="Courier"/>
+              </a:rPr>
+              <a:t>|&gt;</a:t>
+            </a:r>
+            <a:r>
+              <a:rPr>
+                <a:solidFill>
+                  <a:srgbClr val="003B4F"/>
+                </a:solidFill>
+                <a:latin typeface="Courier"/>
+              </a:rPr>
+              <a:t> </a:t>
+            </a:r>
+            <a:r>
+              <a:rPr>
+                <a:solidFill>
+                  <a:srgbClr val="4758AB"/>
+                </a:solidFill>
+                <a:latin typeface="Courier"/>
+              </a:rPr>
+              <a:t>head</a:t>
+            </a:r>
+            <a:r>
+              <a:rPr>
+                <a:solidFill>
+                  <a:srgbClr val="003B4F"/>
+                </a:solidFill>
+                <a:latin typeface="Courier"/>
+              </a:rPr>
+              <a:t>()</a:t>
+            </a:r>
+          </a:p>
+          <a:p>
+            <a:pPr lvl="0" indent="0">
+              <a:buNone/>
+            </a:pPr>
+            <a:r>
+              <a:rPr>
+                <a:latin typeface="Courier"/>
+              </a:rPr>
+              <a:t># A tibble: 6 × 4
+  n_s   wind  tree_no length_mm
+  &lt;chr&gt; &lt;chr&gt;   &lt;dbl&gt;     &lt;dbl&gt;
+1 n     lee         1        20
+2 n     lee         1        21
+3 n     lee         1        23
+4 n     lee         1        25
+5 n     lee         1        21
+6 n     lee         1        16</a:t>
+            </a:r>
+          </a:p>
+          <a:p>
+            <a:pPr lvl="0" indent="0" marL="1270000">
+              <a:buNone/>
+            </a:pPr>
+            <a:r>
+              <a:rPr sz="2000" b="1"/>
+              <a:t>Note</a:t>
+            </a:r>
+          </a:p>
+          <a:p>
+            <a:pPr lvl="0" indent="0" marL="1270000">
+              <a:buNone/>
+            </a:pPr>
+            <a:r>
+              <a:rPr sz="2000" b="1"/>
+              <a:t>✅ Key idea</a:t>
+            </a:r>
+          </a:p>
+          <a:p>
+            <a:pPr lvl="0" indent="0" marL="1270000">
+              <a:buNone/>
+            </a:pPr>
+            <a:r>
+              <a:rPr sz="2000">
+                <a:latin typeface="Courier"/>
+              </a:rPr>
+              <a:t>select()</a:t>
+            </a:r>
+            <a:r>
+              <a:rPr sz="2000"/>
+              <a:t> doesn’t touch rows — it only trims the columns you’re carrying forward. Useful the moment a dataset has 30+ columns and you need 4 of them.</a:t>
+            </a:r>
+          </a:p>
+        </p:txBody>
+      </p:sp>
+      <p:sp>
+        <p:nvSpPr>
+          <p:cNvPr id="4" name="Content Placeholder 3"/>
+          <p:cNvSpPr>
+            <a:spLocks noGrp="1"/>
+          </p:cNvSpPr>
+          <p:nvPr>
+            <p:ph idx="2" sz="half"/>
+          </p:nvPr>
+        </p:nvSpPr>
+        <p:spPr/>
+        <p:txBody>
+          <a:bodyPr/>
+          <a:lstStyle/>
+          <a:p>
+            <a:pPr lvl="0" indent="0" marL="0">
+              <a:buNone/>
+            </a:pPr>
+            <a:r>
+              <a:rPr b="1"/>
+              <a:t>Useful helpers:</a:t>
+            </a:r>
+          </a:p>
+          <a:p>
+            <a:pPr lvl="0"/>
+            <a:r>
+              <a:rPr>
+                <a:latin typeface="Courier"/>
+              </a:rPr>
+              <a:t>starts_with("x")</a:t>
+            </a:r>
+          </a:p>
+          <a:p>
+            <a:pPr lvl="0"/>
+            <a:r>
+              <a:rPr>
+                <a:latin typeface="Courier"/>
+              </a:rPr>
+              <a:t>ends_with("_mm")</a:t>
+            </a:r>
+          </a:p>
+          <a:p>
+            <a:pPr lvl="0"/>
+            <a:r>
+              <a:rPr>
+                <a:latin typeface="Courier"/>
+              </a:rPr>
+              <a:t>contains("wind")</a:t>
+            </a:r>
+          </a:p>
+          <a:p>
+            <a:pPr lvl="0" indent="0" marL="0">
+              <a:buNone/>
+            </a:pPr>
+            <a:r>
+              <a:rPr/>
+              <a:t>📖 R4DS §3.3 — </a:t>
+            </a:r>
+            <a:r>
+              <a:rPr>
+                <a:latin typeface="Courier"/>
+              </a:rPr>
+              <a:t>select()</a:t>
+            </a:r>
+          </a:p>
+        </p:txBody>
+      </p:sp>
+    </p:spTree>
+  </p:cSld>
+</p:sld>
+</file>
+
 <file path=ppt/slides/slide9.xml><?xml version="1.0" encoding="utf-8"?>
 <p:sld xmlns:a="http://schemas.openxmlformats.org/drawingml/2006/main" xmlns:r="http://schemas.openxmlformats.org/officeDocument/2006/relationships" xmlns:p="http://schemas.openxmlformats.org/presentationml/2006/main">
   <p:cSld>
@@ -9786,11 +10139,11 @@
               <a:rPr>
                 <a:latin typeface="Courier"/>
               </a:rPr>
-              <a:t>select()</a:t>
+              <a:t>mutate()</a:t>
             </a:r>
             <a:r>
               <a:rPr/>
-              <a:t> — Picking Columns</a:t>
+              <a:t> — Creating and Changing Columns</a:t>
             </a:r>
           </a:p>
         </p:txBody>
@@ -9802,7 +10155,7 @@
             <a:spLocks noGrp="1"/>
           </p:cNvSpPr>
           <p:nvPr>
-            <p:ph idx="1" sz="half"/>
+            <p:ph idx="1"/>
           </p:nvPr>
         </p:nvSpPr>
         <p:spPr/>
@@ -9810,405 +10163,6 @@
           <a:bodyPr/>
           <a:lstStyle/>
           <a:p>
-            <a:pPr lvl="0" indent="0">
-              <a:buNone/>
-            </a:pPr>
-            <a:r>
-              <a:rPr>
-                <a:solidFill>
-                  <a:srgbClr val="5E5E5E"/>
-                </a:solidFill>
-                <a:latin typeface="Courier"/>
-              </a:rPr>
-              <a:t># Keep only side and length</a:t>
-            </a:r>
-            <a:br/>
-            <a:r>
-              <a:rPr>
-                <a:solidFill>
-                  <a:srgbClr val="003B4F"/>
-                </a:solidFill>
-                <a:latin typeface="Courier"/>
-              </a:rPr>
-              <a:t>pine_csv_df </a:t>
-            </a:r>
-            <a:r>
-              <a:rPr>
-                <a:solidFill>
-                  <a:srgbClr val="5E5E5E"/>
-                </a:solidFill>
-                <a:latin typeface="Courier"/>
-              </a:rPr>
-              <a:t>|&gt;</a:t>
-            </a:r>
-            <a:r>
-              <a:rPr>
-                <a:solidFill>
-                  <a:srgbClr val="003B4F"/>
-                </a:solidFill>
-                <a:latin typeface="Courier"/>
-              </a:rPr>
-              <a:t> </a:t>
-            </a:r>
-            <a:r>
-              <a:rPr>
-                <a:solidFill>
-                  <a:srgbClr val="4758AB"/>
-                </a:solidFill>
-                <a:latin typeface="Courier"/>
-              </a:rPr>
-              <a:t>select</a:t>
-            </a:r>
-            <a:r>
-              <a:rPr>
-                <a:solidFill>
-                  <a:srgbClr val="003B4F"/>
-                </a:solidFill>
-                <a:latin typeface="Courier"/>
-              </a:rPr>
-              <a:t>(n_s, length_mm) </a:t>
-            </a:r>
-            <a:r>
-              <a:rPr>
-                <a:solidFill>
-                  <a:srgbClr val="5E5E5E"/>
-                </a:solidFill>
-                <a:latin typeface="Courier"/>
-              </a:rPr>
-              <a:t>|&gt;</a:t>
-            </a:r>
-            <a:r>
-              <a:rPr>
-                <a:solidFill>
-                  <a:srgbClr val="003B4F"/>
-                </a:solidFill>
-                <a:latin typeface="Courier"/>
-              </a:rPr>
-              <a:t> </a:t>
-            </a:r>
-            <a:r>
-              <a:rPr>
-                <a:solidFill>
-                  <a:srgbClr val="4758AB"/>
-                </a:solidFill>
-                <a:latin typeface="Courier"/>
-              </a:rPr>
-              <a:t>head</a:t>
-            </a:r>
-            <a:r>
-              <a:rPr>
-                <a:solidFill>
-                  <a:srgbClr val="003B4F"/>
-                </a:solidFill>
-                <a:latin typeface="Courier"/>
-              </a:rPr>
-              <a:t>()</a:t>
-            </a:r>
-          </a:p>
-          <a:p>
-            <a:pPr lvl="0" indent="0">
-              <a:buNone/>
-            </a:pPr>
-            <a:r>
-              <a:rPr>
-                <a:latin typeface="Courier"/>
-              </a:rPr>
-              <a:t># A tibble: 6 × 2
-  n_s   length_mm
-  &lt;chr&gt;     &lt;dbl&gt;
-1 n            20
-2 n            21
-3 n            23
-4 n            25
-5 n            21
-6 n            16</a:t>
-            </a:r>
-          </a:p>
-          <a:p>
-            <a:pPr lvl="0" indent="0">
-              <a:buNone/>
-            </a:pPr>
-            <a:r>
-              <a:rPr>
-                <a:solidFill>
-                  <a:srgbClr val="5E5E5E"/>
-                </a:solidFill>
-                <a:latin typeface="Courier"/>
-              </a:rPr>
-              <a:t># Drop the date column (minus sign)</a:t>
-            </a:r>
-            <a:br/>
-            <a:r>
-              <a:rPr>
-                <a:solidFill>
-                  <a:srgbClr val="003B4F"/>
-                </a:solidFill>
-                <a:latin typeface="Courier"/>
-              </a:rPr>
-              <a:t>pine_csv_df </a:t>
-            </a:r>
-            <a:r>
-              <a:rPr>
-                <a:solidFill>
-                  <a:srgbClr val="5E5E5E"/>
-                </a:solidFill>
-                <a:latin typeface="Courier"/>
-              </a:rPr>
-              <a:t>|&gt;</a:t>
-            </a:r>
-            <a:r>
-              <a:rPr>
-                <a:solidFill>
-                  <a:srgbClr val="003B4F"/>
-                </a:solidFill>
-                <a:latin typeface="Courier"/>
-              </a:rPr>
-              <a:t> </a:t>
-            </a:r>
-            <a:r>
-              <a:rPr>
-                <a:solidFill>
-                  <a:srgbClr val="4758AB"/>
-                </a:solidFill>
-                <a:latin typeface="Courier"/>
-              </a:rPr>
-              <a:t>select</a:t>
-            </a:r>
-            <a:r>
-              <a:rPr>
-                <a:solidFill>
-                  <a:srgbClr val="003B4F"/>
-                </a:solidFill>
-                <a:latin typeface="Courier"/>
-              </a:rPr>
-              <a:t>(</a:t>
-            </a:r>
-            <a:r>
-              <a:rPr>
-                <a:solidFill>
-                  <a:srgbClr val="5E5E5E"/>
-                </a:solidFill>
-                <a:latin typeface="Courier"/>
-              </a:rPr>
-              <a:t>-</a:t>
-            </a:r>
-            <a:r>
-              <a:rPr>
-                <a:solidFill>
-                  <a:srgbClr val="003B4F"/>
-                </a:solidFill>
-                <a:latin typeface="Courier"/>
-              </a:rPr>
-              <a:t>date) </a:t>
-            </a:r>
-            <a:r>
-              <a:rPr>
-                <a:solidFill>
-                  <a:srgbClr val="5E5E5E"/>
-                </a:solidFill>
-                <a:latin typeface="Courier"/>
-              </a:rPr>
-              <a:t>|&gt;</a:t>
-            </a:r>
-            <a:r>
-              <a:rPr>
-                <a:solidFill>
-                  <a:srgbClr val="003B4F"/>
-                </a:solidFill>
-                <a:latin typeface="Courier"/>
-              </a:rPr>
-              <a:t> </a:t>
-            </a:r>
-            <a:r>
-              <a:rPr>
-                <a:solidFill>
-                  <a:srgbClr val="4758AB"/>
-                </a:solidFill>
-                <a:latin typeface="Courier"/>
-              </a:rPr>
-              <a:t>head</a:t>
-            </a:r>
-            <a:r>
-              <a:rPr>
-                <a:solidFill>
-                  <a:srgbClr val="003B4F"/>
-                </a:solidFill>
-                <a:latin typeface="Courier"/>
-              </a:rPr>
-              <a:t>()</a:t>
-            </a:r>
-          </a:p>
-          <a:p>
-            <a:pPr lvl="0" indent="0">
-              <a:buNone/>
-            </a:pPr>
-            <a:r>
-              <a:rPr>
-                <a:latin typeface="Courier"/>
-              </a:rPr>
-              <a:t># A tibble: 6 × 5
-  group       n_s   wind  tree_no length_mm
-  &lt;chr&gt;       &lt;chr&gt; &lt;chr&gt;   &lt;dbl&gt;     &lt;dbl&gt;
-1 cephalopods n     lee         1        20
-2 cephalopods n     lee         1        21
-3 cephalopods n     lee         1        23
-4 cephalopods n     lee         1        25
-5 cephalopods n     lee         1        21
-6 cephalopods n     lee         1        16</a:t>
-            </a:r>
-          </a:p>
-          <a:p>
-            <a:pPr lvl="0" indent="0">
-              <a:buNone/>
-            </a:pPr>
-            <a:r>
-              <a:rPr>
-                <a:solidFill>
-                  <a:srgbClr val="5E5E5E"/>
-                </a:solidFill>
-                <a:latin typeface="Courier"/>
-              </a:rPr>
-              <a:t># Keep columns that contain a word</a:t>
-            </a:r>
-            <a:br/>
-            <a:r>
-              <a:rPr>
-                <a:solidFill>
-                  <a:srgbClr val="003B4F"/>
-                </a:solidFill>
-                <a:latin typeface="Courier"/>
-              </a:rPr>
-              <a:t>pine_csv_df </a:t>
-            </a:r>
-            <a:r>
-              <a:rPr>
-                <a:solidFill>
-                  <a:srgbClr val="5E5E5E"/>
-                </a:solidFill>
-                <a:latin typeface="Courier"/>
-              </a:rPr>
-              <a:t>|&gt;</a:t>
-            </a:r>
-            <a:r>
-              <a:rPr>
-                <a:solidFill>
-                  <a:srgbClr val="003B4F"/>
-                </a:solidFill>
-                <a:latin typeface="Courier"/>
-              </a:rPr>
-              <a:t> </a:t>
-            </a:r>
-            <a:r>
-              <a:rPr>
-                <a:solidFill>
-                  <a:srgbClr val="4758AB"/>
-                </a:solidFill>
-                <a:latin typeface="Courier"/>
-              </a:rPr>
-              <a:t>select</a:t>
-            </a:r>
-            <a:r>
-              <a:rPr>
-                <a:solidFill>
-                  <a:srgbClr val="003B4F"/>
-                </a:solidFill>
-                <a:latin typeface="Courier"/>
-              </a:rPr>
-              <a:t>(</a:t>
-            </a:r>
-            <a:r>
-              <a:rPr>
-                <a:solidFill>
-                  <a:srgbClr val="4758AB"/>
-                </a:solidFill>
-                <a:latin typeface="Courier"/>
-              </a:rPr>
-              <a:t>contains</a:t>
-            </a:r>
-            <a:r>
-              <a:rPr>
-                <a:solidFill>
-                  <a:srgbClr val="003B4F"/>
-                </a:solidFill>
-                <a:latin typeface="Courier"/>
-              </a:rPr>
-              <a:t>(</a:t>
-            </a:r>
-            <a:r>
-              <a:rPr>
-                <a:solidFill>
-                  <a:srgbClr val="20794D"/>
-                </a:solidFill>
-                <a:latin typeface="Courier"/>
-              </a:rPr>
-              <a:t>"n"</a:t>
-            </a:r>
-            <a:r>
-              <a:rPr>
-                <a:solidFill>
-                  <a:srgbClr val="003B4F"/>
-                </a:solidFill>
-                <a:latin typeface="Courier"/>
-              </a:rPr>
-              <a:t>)) </a:t>
-            </a:r>
-            <a:r>
-              <a:rPr>
-                <a:solidFill>
-                  <a:srgbClr val="5E5E5E"/>
-                </a:solidFill>
-                <a:latin typeface="Courier"/>
-              </a:rPr>
-              <a:t>|&gt;</a:t>
-            </a:r>
-            <a:r>
-              <a:rPr>
-                <a:solidFill>
-                  <a:srgbClr val="003B4F"/>
-                </a:solidFill>
-                <a:latin typeface="Courier"/>
-              </a:rPr>
-              <a:t> </a:t>
-            </a:r>
-            <a:r>
-              <a:rPr>
-                <a:solidFill>
-                  <a:srgbClr val="4758AB"/>
-                </a:solidFill>
-                <a:latin typeface="Courier"/>
-              </a:rPr>
-              <a:t>head</a:t>
-            </a:r>
-            <a:r>
-              <a:rPr>
-                <a:solidFill>
-                  <a:srgbClr val="003B4F"/>
-                </a:solidFill>
-                <a:latin typeface="Courier"/>
-              </a:rPr>
-              <a:t>()</a:t>
-            </a:r>
-          </a:p>
-          <a:p>
-            <a:pPr lvl="0" indent="0">
-              <a:buNone/>
-            </a:pPr>
-            <a:r>
-              <a:rPr>
-                <a:latin typeface="Courier"/>
-              </a:rPr>
-              <a:t># A tibble: 6 × 4
-  n_s   wind  tree_no length_mm
-  &lt;chr&gt; &lt;chr&gt;   &lt;dbl&gt;     &lt;dbl&gt;
-1 n     lee         1        20
-2 n     lee         1        21
-3 n     lee         1        23
-4 n     lee         1        25
-5 n     lee         1        21
-6 n     lee         1        16</a:t>
-            </a:r>
-          </a:p>
-          <a:p>
             <a:pPr lvl="0" indent="0" marL="1270000">
               <a:buNone/>
             </a:pPr>
@@ -10223,89 +10177,57 @@
             </a:pPr>
             <a:r>
               <a:rPr sz="2000" b="1"/>
-              <a:t>✅ Key idea</a:t>
-            </a:r>
-          </a:p>
-          <a:p>
-            <a:pPr lvl="0" indent="0" marL="1270000">
-              <a:buNone/>
-            </a:pPr>
+              <a:t>🔮 Predict first:</a:t>
+            </a:r>
+            <a:r>
+              <a:rPr sz="2000"/>
+              <a:t> </a:t>
+            </a:r>
             <a:r>
               <a:rPr sz="2000">
                 <a:latin typeface="Courier"/>
               </a:rPr>
-              <a:t>select()</a:t>
+              <a:t>length_mm / 10</a:t>
             </a:r>
             <a:r>
               <a:rPr sz="2000"/>
-              <a:t> doesn’t touch rows — it only trims the columns you’re carrying forward. Useful the moment a dataset has 30+ columns and you need 4 of them.</a:t>
-            </a:r>
-          </a:p>
-        </p:txBody>
-      </p:sp>
-      <p:sp>
-        <p:nvSpPr>
-          <p:cNvPr id="4" name="Content Placeholder 3"/>
-          <p:cNvSpPr>
-            <a:spLocks noGrp="1"/>
-          </p:cNvSpPr>
-          <p:nvPr>
-            <p:ph idx="2" sz="half"/>
-          </p:nvPr>
-        </p:nvSpPr>
-        <p:spPr/>
-        <p:txBody>
-          <a:bodyPr/>
-          <a:lstStyle/>
-          <a:p>
-            <a:pPr lvl="0" indent="0" marL="0">
-              <a:buNone/>
-            </a:pPr>
-            <a:r>
-              <a:rPr b="1"/>
-              <a:t>Useful helpers:</a:t>
-            </a:r>
-          </a:p>
-          <a:p>
-            <a:pPr lvl="0"/>
-            <a:r>
-              <a:rPr>
-                <a:latin typeface="Courier"/>
-              </a:rPr>
-              <a:t>starts_with("x")</a:t>
-            </a:r>
-          </a:p>
-          <a:p>
-            <a:pPr lvl="0"/>
-            <a:r>
-              <a:rPr>
-                <a:latin typeface="Courier"/>
-              </a:rPr>
-              <a:t>ends_with("_mm")</a:t>
-            </a:r>
-          </a:p>
-          <a:p>
-            <a:pPr lvl="0"/>
-            <a:r>
-              <a:rPr>
-                <a:latin typeface="Courier"/>
-              </a:rPr>
-              <a:t>contains("wind")</a:t>
-            </a:r>
-          </a:p>
-          <a:p>
-            <a:pPr lvl="0" indent="0" marL="0">
-              <a:buNone/>
-            </a:pPr>
-            <a:r>
-              <a:rPr/>
-              <a:t>📖 R4DS §3.3 — </a:t>
-            </a:r>
-            <a:r>
-              <a:rPr>
-                <a:latin typeface="Courier"/>
-              </a:rPr>
-              <a:t>select()</a:t>
+              <a:t> converts millimeters to centimeters. Will </a:t>
+            </a:r>
+            <a:r>
+              <a:rPr sz="2000">
+                <a:latin typeface="Courier"/>
+              </a:rPr>
+              <a:t>mutate()</a:t>
+            </a:r>
+            <a:r>
+              <a:rPr sz="2000"/>
+              <a:t> </a:t>
+            </a:r>
+            <a:r>
+              <a:rPr sz="2000" b="1"/>
+              <a:t>replace</a:t>
+            </a:r>
+            <a:r>
+              <a:rPr sz="2000"/>
+              <a:t> </a:t>
+            </a:r>
+            <a:r>
+              <a:rPr sz="2000">
+                <a:latin typeface="Courier"/>
+              </a:rPr>
+              <a:t>length_mm</a:t>
+            </a:r>
+            <a:r>
+              <a:rPr sz="2000"/>
+              <a:t>, or </a:t>
+            </a:r>
+            <a:r>
+              <a:rPr sz="2000" b="1"/>
+              <a:t>add</a:t>
+            </a:r>
+            <a:r>
+              <a:rPr sz="2000"/>
+              <a:t> a new column? How many columns will the result have?</a:t>
             </a:r>
           </a:p>
         </p:txBody>
